--- a/public/fun/pack/pptx/family/가족소개_05_반려동물과함께_청보리밭.pptx
+++ b/public/fun/pack/pptx/family/가족소개_05_반려동물과함께_청보리밭.pptx
@@ -3347,7 +3347,7 @@
             <a:r>
               <a:rPr sz="3600" b="1" i="0">
                 <a:solidFill>
-                  <a:srgbClr val="2F481E"/>
+                  <a:srgbClr val="416F1F"/>
                 </a:solidFill>
               </a:rPr>
               <a:t>우리 가족을 소개합니다</a:t>
@@ -3385,7 +3385,7 @@
             <a:r>
               <a:rPr sz="1700" b="0" i="1">
                 <a:solidFill>
-                  <a:srgbClr val="2F481E"/>
+                  <a:srgbClr val="416F1F"/>
                 </a:solidFill>
               </a:rPr>
               <a:t>청보리밭 사이를 뛰어다니던 모습</a:t>
@@ -3472,7 +3472,7 @@
             <a:avLst/>
           </a:prstGeom>
           <a:solidFill>
-            <a:srgbClr val="DEEFD2"/>
+            <a:srgbClr val="E3F7D4"/>
           </a:solidFill>
           <a:ln>
             <a:noFill/>
@@ -3501,7 +3501,7 @@
             <a:avLst/>
           </a:prstGeom>
           <a:solidFill>
-            <a:srgbClr val="5F913B"/>
+            <a:srgbClr val="82CD4C"/>
           </a:solidFill>
           <a:ln>
             <a:noFill/>
@@ -3545,7 +3545,7 @@
             <a:r>
               <a:rPr sz="3000" b="1" i="0">
                 <a:solidFill>
-                  <a:srgbClr val="2F481E"/>
+                  <a:srgbClr val="416F1F"/>
                 </a:solidFill>
               </a:rPr>
               <a:t>가족 구성원</a:t>
@@ -3568,11 +3568,11 @@
             <a:avLst/>
           </a:prstGeom>
           <a:solidFill>
-            <a:srgbClr val="DEEFD2"/>
+            <a:srgbClr val="E3F7D4"/>
           </a:solidFill>
           <a:ln w="19050">
             <a:solidFill>
-              <a:srgbClr val="5F913B"/>
+              <a:srgbClr val="82CD4C"/>
             </a:solidFill>
             <a:prstDash val="dash"/>
           </a:ln>
@@ -3591,7 +3591,7 @@
             <a:r>
               <a:rPr sz="1200" b="0" i="0">
                 <a:solidFill>
-                  <a:srgbClr val="2F481E"/>
+                  <a:srgbClr val="416F1F"/>
                 </a:solidFill>
               </a:rPr>
               <a:t>사진</a:t>
@@ -3629,7 +3629,7 @@
             <a:r>
               <a:rPr sz="1600" b="1" i="0">
                 <a:solidFill>
-                  <a:srgbClr val="2F481E"/>
+                  <a:srgbClr val="416F1F"/>
                 </a:solidFill>
               </a:rPr>
               <a:t>보호자 1</a:t>
@@ -3720,11 +3720,11 @@
             <a:avLst/>
           </a:prstGeom>
           <a:solidFill>
-            <a:srgbClr val="DEEFD2"/>
+            <a:srgbClr val="E3F7D4"/>
           </a:solidFill>
           <a:ln w="19050">
             <a:solidFill>
-              <a:srgbClr val="5F913B"/>
+              <a:srgbClr val="82CD4C"/>
             </a:solidFill>
             <a:prstDash val="dash"/>
           </a:ln>
@@ -3743,7 +3743,7 @@
             <a:r>
               <a:rPr sz="1200" b="0" i="0">
                 <a:solidFill>
-                  <a:srgbClr val="2F481E"/>
+                  <a:srgbClr val="416F1F"/>
                 </a:solidFill>
               </a:rPr>
               <a:t>사진</a:t>
@@ -3781,7 +3781,7 @@
             <a:r>
               <a:rPr sz="1600" b="1" i="0">
                 <a:solidFill>
-                  <a:srgbClr val="2F481E"/>
+                  <a:srgbClr val="416F1F"/>
                 </a:solidFill>
               </a:rPr>
               <a:t>보호자 2</a:t>
@@ -3872,11 +3872,11 @@
             <a:avLst/>
           </a:prstGeom>
           <a:solidFill>
-            <a:srgbClr val="DEEFD2"/>
+            <a:srgbClr val="E3F7D4"/>
           </a:solidFill>
           <a:ln w="19050">
             <a:solidFill>
-              <a:srgbClr val="5F913B"/>
+              <a:srgbClr val="82CD4C"/>
             </a:solidFill>
             <a:prstDash val="dash"/>
           </a:ln>
@@ -3895,7 +3895,7 @@
             <a:r>
               <a:rPr sz="1200" b="0" i="0">
                 <a:solidFill>
-                  <a:srgbClr val="2F481E"/>
+                  <a:srgbClr val="416F1F"/>
                 </a:solidFill>
               </a:rPr>
               <a:t>사진</a:t>
@@ -3933,7 +3933,7 @@
             <a:r>
               <a:rPr sz="1600" b="1" i="0">
                 <a:solidFill>
-                  <a:srgbClr val="2F481E"/>
+                  <a:srgbClr val="416F1F"/>
                 </a:solidFill>
               </a:rPr>
               <a:t>우리 반려동물</a:t>
@@ -4050,7 +4050,7 @@
             <a:avLst/>
           </a:prstGeom>
           <a:solidFill>
-            <a:srgbClr val="DEEFD2"/>
+            <a:srgbClr val="E3F7D4"/>
           </a:solidFill>
           <a:ln>
             <a:noFill/>
@@ -4079,7 +4079,7 @@
             <a:avLst/>
           </a:prstGeom>
           <a:solidFill>
-            <a:srgbClr val="5F913B"/>
+            <a:srgbClr val="82CD4C"/>
           </a:solidFill>
           <a:ln>
             <a:noFill/>
@@ -4123,7 +4123,7 @@
             <a:r>
               <a:rPr sz="3000" b="1" i="0">
                 <a:solidFill>
-                  <a:srgbClr val="2F481E"/>
+                  <a:srgbClr val="416F1F"/>
                 </a:solidFill>
               </a:rPr>
               <a:t>우리 가족 이야기</a:t>
@@ -4146,7 +4146,7 @@
             <a:avLst/>
           </a:prstGeom>
           <a:solidFill>
-            <a:srgbClr val="DEEFD2"/>
+            <a:srgbClr val="E3F7D4"/>
           </a:solidFill>
           <a:ln>
             <a:noFill/>
@@ -4175,7 +4175,7 @@
             <a:avLst/>
           </a:prstGeom>
           <a:solidFill>
-            <a:srgbClr val="5F913B"/>
+            <a:srgbClr val="82CD4C"/>
           </a:solidFill>
           <a:ln w="38100">
             <a:solidFill>
@@ -4221,7 +4221,7 @@
             <a:r>
               <a:rPr sz="1600" b="1" i="0">
                 <a:solidFill>
-                  <a:srgbClr val="5F913B"/>
+                  <a:srgbClr val="82CD4C"/>
                 </a:solidFill>
               </a:rPr>
               <a:t>처음 만난 날</a:t>
@@ -4259,7 +4259,7 @@
             <a:r>
               <a:rPr sz="1800" b="1" i="0">
                 <a:solidFill>
-                  <a:srgbClr val="2F481E"/>
+                  <a:srgbClr val="416F1F"/>
                 </a:solidFill>
               </a:rPr>
               <a:t>우리의 인연</a:t>
@@ -4320,7 +4320,7 @@
             <a:avLst/>
           </a:prstGeom>
           <a:solidFill>
-            <a:srgbClr val="5F913B"/>
+            <a:srgbClr val="82CD4C"/>
           </a:solidFill>
           <a:ln w="38100">
             <a:solidFill>
@@ -4366,7 +4366,7 @@
             <a:r>
               <a:rPr sz="1600" b="1" i="0">
                 <a:solidFill>
-                  <a:srgbClr val="5F913B"/>
+                  <a:srgbClr val="82CD4C"/>
                 </a:solidFill>
               </a:rPr>
               <a:t>첫 산책</a:t>
@@ -4404,7 +4404,7 @@
             <a:r>
               <a:rPr sz="1800" b="1" i="0">
                 <a:solidFill>
-                  <a:srgbClr val="2F481E"/>
+                  <a:srgbClr val="416F1F"/>
                 </a:solidFill>
               </a:rPr>
               <a:t>함께한 첫 걸음</a:t>
@@ -4465,7 +4465,7 @@
             <a:avLst/>
           </a:prstGeom>
           <a:solidFill>
-            <a:srgbClr val="5F913B"/>
+            <a:srgbClr val="82CD4C"/>
           </a:solidFill>
           <a:ln w="38100">
             <a:solidFill>
@@ -4511,7 +4511,7 @@
             <a:r>
               <a:rPr sz="1600" b="1" i="0">
                 <a:solidFill>
-                  <a:srgbClr val="5F913B"/>
+                  <a:srgbClr val="82CD4C"/>
                 </a:solidFill>
               </a:rPr>
               <a:t>가장 웃었던 날</a:t>
@@ -4549,7 +4549,7 @@
             <a:r>
               <a:rPr sz="1800" b="1" i="0">
                 <a:solidFill>
-                  <a:srgbClr val="2F481E"/>
+                  <a:srgbClr val="416F1F"/>
                 </a:solidFill>
               </a:rPr>
               <a:t>잊지 못할 순간</a:t>
@@ -4610,7 +4610,7 @@
             <a:avLst/>
           </a:prstGeom>
           <a:solidFill>
-            <a:srgbClr val="5F913B"/>
+            <a:srgbClr val="82CD4C"/>
           </a:solidFill>
           <a:ln w="38100">
             <a:solidFill>
@@ -4656,7 +4656,7 @@
             <a:r>
               <a:rPr sz="1600" b="1" i="0">
                 <a:solidFill>
-                  <a:srgbClr val="5F913B"/>
+                  <a:srgbClr val="82CD4C"/>
                 </a:solidFill>
               </a:rPr>
               <a:t>지금</a:t>
@@ -4694,7 +4694,7 @@
             <a:r>
               <a:rPr sz="1800" b="1" i="0">
                 <a:solidFill>
-                  <a:srgbClr val="2F481E"/>
+                  <a:srgbClr val="416F1F"/>
                 </a:solidFill>
               </a:rPr>
               <a:t>오늘의 우리</a:t>
@@ -4781,7 +4781,7 @@
             <a:avLst/>
           </a:prstGeom>
           <a:solidFill>
-            <a:srgbClr val="DEEFD2"/>
+            <a:srgbClr val="E3F7D4"/>
           </a:solidFill>
           <a:ln>
             <a:noFill/>
@@ -4810,7 +4810,7 @@
             <a:avLst/>
           </a:prstGeom>
           <a:solidFill>
-            <a:srgbClr val="5F913B"/>
+            <a:srgbClr val="82CD4C"/>
           </a:solidFill>
           <a:ln>
             <a:noFill/>
@@ -4854,7 +4854,7 @@
             <a:r>
               <a:rPr sz="3000" b="1" i="0">
                 <a:solidFill>
-                  <a:srgbClr val="2F481E"/>
+                  <a:srgbClr val="416F1F"/>
                 </a:solidFill>
               </a:rPr>
               <a:t>우리 가족의 약속</a:t>
@@ -4879,11 +4879,11 @@
             </a:avLst>
           </a:prstGeom>
           <a:solidFill>
-            <a:srgbClr val="F4F9F1"/>
+            <a:srgbClr val="F7FCF3"/>
           </a:solidFill>
           <a:ln w="12700">
             <a:solidFill>
-              <a:srgbClr val="DEEFD2"/>
+              <a:srgbClr val="E3F7D4"/>
             </a:solidFill>
           </a:ln>
         </p:spPr>
@@ -4910,7 +4910,7 @@
             <a:avLst/>
           </a:prstGeom>
           <a:solidFill>
-            <a:srgbClr val="5F913B"/>
+            <a:srgbClr val="82CD4C"/>
           </a:solidFill>
           <a:ln>
             <a:noFill/>
@@ -4968,7 +4968,7 @@
             <a:r>
               <a:rPr sz="1800" b="1" i="0">
                 <a:solidFill>
-                  <a:srgbClr val="2F481E"/>
+                  <a:srgbClr val="416F1F"/>
                 </a:solidFill>
               </a:rPr>
               <a:t>약속 1</a:t>
@@ -5031,11 +5031,11 @@
             </a:avLst>
           </a:prstGeom>
           <a:solidFill>
-            <a:srgbClr val="F4F9F1"/>
+            <a:srgbClr val="F7FCF3"/>
           </a:solidFill>
           <a:ln w="12700">
             <a:solidFill>
-              <a:srgbClr val="DEEFD2"/>
+              <a:srgbClr val="E3F7D4"/>
             </a:solidFill>
           </a:ln>
         </p:spPr>
@@ -5062,7 +5062,7 @@
             <a:avLst/>
           </a:prstGeom>
           <a:solidFill>
-            <a:srgbClr val="5F913B"/>
+            <a:srgbClr val="82CD4C"/>
           </a:solidFill>
           <a:ln>
             <a:noFill/>
@@ -5120,7 +5120,7 @@
             <a:r>
               <a:rPr sz="1800" b="1" i="0">
                 <a:solidFill>
-                  <a:srgbClr val="2F481E"/>
+                  <a:srgbClr val="416F1F"/>
                 </a:solidFill>
               </a:rPr>
               <a:t>약속 2</a:t>
@@ -5183,11 +5183,11 @@
             </a:avLst>
           </a:prstGeom>
           <a:solidFill>
-            <a:srgbClr val="F4F9F1"/>
+            <a:srgbClr val="F7FCF3"/>
           </a:solidFill>
           <a:ln w="12700">
             <a:solidFill>
-              <a:srgbClr val="DEEFD2"/>
+              <a:srgbClr val="E3F7D4"/>
             </a:solidFill>
           </a:ln>
         </p:spPr>
@@ -5214,7 +5214,7 @@
             <a:avLst/>
           </a:prstGeom>
           <a:solidFill>
-            <a:srgbClr val="5F913B"/>
+            <a:srgbClr val="82CD4C"/>
           </a:solidFill>
           <a:ln>
             <a:noFill/>
@@ -5272,7 +5272,7 @@
             <a:r>
               <a:rPr sz="1800" b="1" i="0">
                 <a:solidFill>
-                  <a:srgbClr val="2F481E"/>
+                  <a:srgbClr val="416F1F"/>
                 </a:solidFill>
               </a:rPr>
               <a:t>약속 3</a:t>
@@ -5359,7 +5359,7 @@
             <a:avLst/>
           </a:prstGeom>
           <a:solidFill>
-            <a:srgbClr val="DEEFD2"/>
+            <a:srgbClr val="E3F7D4"/>
           </a:solidFill>
           <a:ln>
             <a:noFill/>
@@ -5388,7 +5388,7 @@
             <a:avLst/>
           </a:prstGeom>
           <a:solidFill>
-            <a:srgbClr val="5F913B"/>
+            <a:srgbClr val="82CD4C"/>
           </a:solidFill>
           <a:ln>
             <a:noFill/>
@@ -5432,7 +5432,7 @@
             <a:r>
               <a:rPr sz="3000" b="1" i="0">
                 <a:solidFill>
-                  <a:srgbClr val="2F481E"/>
+                  <a:srgbClr val="416F1F"/>
                 </a:solidFill>
               </a:rPr>
               <a:t>가족 사진</a:t>
@@ -5457,11 +5457,11 @@
             </a:avLst>
           </a:prstGeom>
           <a:solidFill>
-            <a:srgbClr val="DEEFD2"/>
+            <a:srgbClr val="E3F7D4"/>
           </a:solidFill>
           <a:ln w="19050">
             <a:solidFill>
-              <a:srgbClr val="5F913B"/>
+              <a:srgbClr val="82CD4C"/>
             </a:solidFill>
             <a:prstDash val="dash"/>
           </a:ln>
@@ -5480,7 +5480,7 @@
             <a:r>
               <a:rPr sz="1200" b="0" i="0">
                 <a:solidFill>
-                  <a:srgbClr val="2F481E"/>
+                  <a:srgbClr val="416F1F"/>
                 </a:solidFill>
               </a:rPr>
               <a:t>사진 1</a:t>
@@ -5505,11 +5505,11 @@
             </a:avLst>
           </a:prstGeom>
           <a:solidFill>
-            <a:srgbClr val="DEEFD2"/>
+            <a:srgbClr val="E3F7D4"/>
           </a:solidFill>
           <a:ln w="19050">
             <a:solidFill>
-              <a:srgbClr val="5F913B"/>
+              <a:srgbClr val="82CD4C"/>
             </a:solidFill>
             <a:prstDash val="dash"/>
           </a:ln>
@@ -5528,7 +5528,7 @@
             <a:r>
               <a:rPr sz="1200" b="0" i="0">
                 <a:solidFill>
-                  <a:srgbClr val="2F481E"/>
+                  <a:srgbClr val="416F1F"/>
                 </a:solidFill>
               </a:rPr>
               <a:t>사진 2</a:t>
@@ -5553,11 +5553,11 @@
             </a:avLst>
           </a:prstGeom>
           <a:solidFill>
-            <a:srgbClr val="DEEFD2"/>
+            <a:srgbClr val="E3F7D4"/>
           </a:solidFill>
           <a:ln w="19050">
             <a:solidFill>
-              <a:srgbClr val="5F913B"/>
+              <a:srgbClr val="82CD4C"/>
             </a:solidFill>
             <a:prstDash val="dash"/>
           </a:ln>
@@ -5576,7 +5576,7 @@
             <a:r>
               <a:rPr sz="1200" b="0" i="0">
                 <a:solidFill>
-                  <a:srgbClr val="2F481E"/>
+                  <a:srgbClr val="416F1F"/>
                 </a:solidFill>
               </a:rPr>
               <a:t>사진 3</a:t>
@@ -5601,11 +5601,11 @@
             </a:avLst>
           </a:prstGeom>
           <a:solidFill>
-            <a:srgbClr val="DEEFD2"/>
+            <a:srgbClr val="E3F7D4"/>
           </a:solidFill>
           <a:ln w="19050">
             <a:solidFill>
-              <a:srgbClr val="5F913B"/>
+              <a:srgbClr val="82CD4C"/>
             </a:solidFill>
             <a:prstDash val="dash"/>
           </a:ln>
@@ -5624,7 +5624,7 @@
             <a:r>
               <a:rPr sz="1200" b="0" i="0">
                 <a:solidFill>
-                  <a:srgbClr val="2F481E"/>
+                  <a:srgbClr val="416F1F"/>
                 </a:solidFill>
               </a:rPr>
               <a:t>사진 4</a:t>
@@ -5649,11 +5649,11 @@
             </a:avLst>
           </a:prstGeom>
           <a:solidFill>
-            <a:srgbClr val="DEEFD2"/>
+            <a:srgbClr val="E3F7D4"/>
           </a:solidFill>
           <a:ln w="19050">
             <a:solidFill>
-              <a:srgbClr val="5F913B"/>
+              <a:srgbClr val="82CD4C"/>
             </a:solidFill>
             <a:prstDash val="dash"/>
           </a:ln>
@@ -5672,7 +5672,7 @@
             <a:r>
               <a:rPr sz="1200" b="0" i="0">
                 <a:solidFill>
-                  <a:srgbClr val="2F481E"/>
+                  <a:srgbClr val="416F1F"/>
                 </a:solidFill>
               </a:rPr>
               <a:t>사진 5</a:t>
@@ -5697,11 +5697,11 @@
             </a:avLst>
           </a:prstGeom>
           <a:solidFill>
-            <a:srgbClr val="DEEFD2"/>
+            <a:srgbClr val="E3F7D4"/>
           </a:solidFill>
           <a:ln w="19050">
             <a:solidFill>
-              <a:srgbClr val="5F913B"/>
+              <a:srgbClr val="82CD4C"/>
             </a:solidFill>
             <a:prstDash val="dash"/>
           </a:ln>
@@ -5720,7 +5720,7 @@
             <a:r>
               <a:rPr sz="1200" b="0" i="0">
                 <a:solidFill>
-                  <a:srgbClr val="2F481E"/>
+                  <a:srgbClr val="416F1F"/>
                 </a:solidFill>
               </a:rPr>
               <a:t>사진 6</a:t>
@@ -5800,7 +5800,7 @@
             <a:r>
               <a:rPr sz="3600" b="1" i="0">
                 <a:solidFill>
-                  <a:srgbClr val="2F481E"/>
+                  <a:srgbClr val="416F1F"/>
                 </a:solidFill>
               </a:rPr>
               <a:t>우리 가족 소개를 마칩니다</a:t>
@@ -5838,7 +5838,7 @@
             <a:r>
               <a:rPr sz="1700" b="0" i="1">
                 <a:solidFill>
-                  <a:srgbClr val="2F481E"/>
+                  <a:srgbClr val="416F1F"/>
                 </a:solidFill>
               </a:rPr>
               <a:t>읽어 주셔서 고맙습니다</a:t>
@@ -5903,34 +5903,34 @@
         <a:sysClr val="window" lastClr="FFFFFF"/>
       </a:lt1>
       <a:dk2>
-        <a:srgbClr val="2F481E"/>
+        <a:srgbClr val="416F1F"/>
       </a:dk2>
       <a:lt2>
-        <a:srgbClr val="F4F9F1"/>
+        <a:srgbClr val="F7FCF3"/>
       </a:lt2>
       <a:accent1>
-        <a:srgbClr val="5F913B"/>
+        <a:srgbClr val="82CD4C"/>
       </a:accent1>
       <a:accent2>
-        <a:srgbClr val="423B91"/>
+        <a:srgbClr val="339941"/>
       </a:accent2>
       <a:accent3>
-        <a:srgbClr val="2F481E"/>
+        <a:srgbClr val="416F1F"/>
       </a:accent3>
       <a:accent4>
-        <a:srgbClr val="DEEFD2"/>
+        <a:srgbClr val="E3F7D4"/>
       </a:accent4>
       <a:accent5>
-        <a:srgbClr val="506666"/>
+        <a:srgbClr val="5AB346"/>
       </a:accent5>
       <a:accent6>
-        <a:srgbClr val="829178"/>
+        <a:srgbClr val="8DA979"/>
       </a:accent6>
       <a:hlink>
-        <a:srgbClr val="5F913B"/>
+        <a:srgbClr val="82CD4C"/>
       </a:hlink>
       <a:folHlink>
-        <a:srgbClr val="2F481E"/>
+        <a:srgbClr val="416F1F"/>
       </a:folHlink>
     </a:clrScheme>
     <a:fontScheme name="Office">

--- a/public/fun/pack/pptx/family/가족소개_05_반려동물과함께_청보리밭.pptx
+++ b/public/fun/pack/pptx/family/가족소개_05_반려동물과함께_청보리밭.pptx
@@ -3286,6 +3286,14 @@
 <file path=ppt/slides/slide1.xml><?xml version="1.0" encoding="utf-8"?>
 <p:sld xmlns:a="http://schemas.openxmlformats.org/drawingml/2006/main" xmlns:p="http://schemas.openxmlformats.org/presentationml/2006/main" xmlns:r="http://schemas.openxmlformats.org/officeDocument/2006/relationships">
   <p:cSld>
+    <p:bg>
+      <p:bgPr>
+        <a:solidFill>
+          <a:srgbClr val="F2FDEA"/>
+        </a:solidFill>
+        <a:effectLst/>
+      </p:bgPr>
+    </p:bg>
     <p:spTree>
       <p:nvGrpSpPr>
         <p:cNvPr id="1" name=""/>
@@ -3293,30 +3301,120 @@
         <p:nvPr/>
       </p:nvGrpSpPr>
       <p:grpSpPr/>
-      <p:pic>
-        <p:nvPicPr>
-          <p:cNvPr id="3" name="표지 그림" descr="family-05.jpg"/>
-          <p:cNvPicPr>
-            <a:picLocks noChangeAspect="1"/>
-          </p:cNvPicPr>
-          <p:nvPr/>
-        </p:nvPicPr>
-        <p:blipFill>
-          <a:blip r:embed="rId2"/>
-          <a:stretch>
-            <a:fillRect/>
-          </a:stretch>
-        </p:blipFill>
-        <p:spPr>
-          <a:xfrm>
-            <a:off x="0" y="0"/>
-            <a:ext cx="12191695" cy="6858000"/>
+      <p:sp>
+        <p:nvSpPr>
+          <p:cNvPr id="3" name="사진 자리"/>
+          <p:cNvSpPr/>
+          <p:nvPr/>
+        </p:nvSpPr>
+        <p:spPr>
+          <a:xfrm>
+            <a:off x="7071183" y="960120"/>
+            <a:ext cx="3657508" cy="4526280"/>
+          </a:xfrm>
+          <a:prstGeom prst="roundRect">
+            <a:avLst>
+              <a:gd name="adj" fmla="val 4000"/>
+            </a:avLst>
+          </a:prstGeom>
+          <a:solidFill>
+            <a:srgbClr val="C6F2A6"/>
+          </a:solidFill>
+          <a:ln>
+            <a:noFill/>
+          </a:ln>
+        </p:spPr>
+        <p:txBody>
+          <a:bodyPr rtlCol="0" anchor="ctr" wrap="square" lIns="54864" rIns="54864" tIns="27432" bIns="27432">
+            <a:noAutofit/>
+          </a:bodyPr>
+          <a:lstStyle/>
+          <a:p>
+            <a:pPr algn="ctr">
+              <a:lnSpc>
+                <a:spcPct val="100000"/>
+              </a:lnSpc>
+            </a:pPr>
+            <a:r>
+              <a:rPr sz="1400" b="0" i="0">
+                <a:solidFill>
+                  <a:srgbClr val="354927"/>
+                </a:solidFill>
+              </a:rPr>
+              <a:t>사진을 넣어 주세요</a:t>
+            </a:r>
+          </a:p>
+        </p:txBody>
+      </p:sp>
+      <p:sp>
+        <p:nvSpPr>
+          <p:cNvPr id="4" name="장식"/>
+          <p:cNvSpPr/>
+          <p:nvPr/>
+        </p:nvSpPr>
+        <p:spPr>
+          <a:xfrm>
+            <a:off x="7558851" y="1234439"/>
+            <a:ext cx="3657508" cy="4526280"/>
+          </a:xfrm>
+          <a:prstGeom prst="roundRect">
+            <a:avLst>
+              <a:gd name="adj" fmla="val 4000"/>
+            </a:avLst>
+          </a:prstGeom>
+          <a:noFill/>
+          <a:ln w="9525">
+            <a:solidFill>
+              <a:srgbClr val="26231F"/>
+            </a:solidFill>
+          </a:ln>
+        </p:spPr>
+        <p:txBody>
+          <a:bodyPr rtlCol="0" anchor="ctr"/>
+          <a:lstStyle/>
+          <a:p>
+            <a:pPr algn="ctr"/>
+          </a:p>
+        </p:txBody>
+      </p:sp>
+      <p:sp>
+        <p:nvSpPr>
+          <p:cNvPr id="5" name="라벨"/>
+          <p:cNvSpPr txBox="1"/>
+          <p:nvPr/>
+        </p:nvSpPr>
+        <p:spPr>
+          <a:xfrm>
+            <a:off x="822960" y="2148840"/>
+            <a:ext cx="5608179" cy="274320"/>
           </a:xfrm>
           <a:prstGeom prst="rect">
             <a:avLst/>
           </a:prstGeom>
-        </p:spPr>
-      </p:pic>
+          <a:noFill/>
+        </p:spPr>
+        <p:txBody>
+          <a:bodyPr wrap="square" lIns="54864" rIns="54864" tIns="27432" bIns="27432" anchor="t">
+            <a:noAutofit/>
+          </a:bodyPr>
+          <a:lstStyle/>
+          <a:p>
+            <a:pPr algn="l">
+              <a:lnSpc>
+                <a:spcPct val="115000"/>
+              </a:lnSpc>
+            </a:pPr>
+            <a:r>
+              <a:rPr sz="1000" b="1" i="0" spc="250">
+                <a:solidFill>
+                  <a:srgbClr val="26231F"/>
+                </a:solidFill>
+              </a:rPr>
+              <a:t>FAMILY ALBUM</a:t>
+            </a:r>
+          </a:p>
+        </p:txBody>
+      </p:sp>
       <p:sp>
         <p:nvSpPr>
           <p:cNvPr id="2" name="Title 1"/>
@@ -3329,8 +3427,8 @@
         </p:nvSpPr>
         <p:spPr>
           <a:xfrm>
-            <a:off x="853418" y="2057400"/>
-            <a:ext cx="6095847" cy="1554480"/>
+            <a:off x="822960" y="2606040"/>
+            <a:ext cx="5608179" cy="1188720"/>
           </a:xfrm>
         </p:spPr>
         <p:txBody>
@@ -3345,9 +3443,9 @@
               </a:lnSpc>
             </a:pPr>
             <a:r>
-              <a:rPr sz="3600" b="1" i="0">
-                <a:solidFill>
-                  <a:srgbClr val="416F1F"/>
+              <a:rPr sz="4000" b="1" i="0">
+                <a:solidFill>
+                  <a:srgbClr val="26231F"/>
                 </a:solidFill>
               </a:rPr>
               <a:t>우리 가족을 소개합니다</a:t>
@@ -3357,14 +3455,14 @@
       </p:sp>
       <p:sp>
         <p:nvSpPr>
-          <p:cNvPr id="4" name="한 줄 문구"/>
+          <p:cNvPr id="6" name="한 줄 문구"/>
           <p:cNvSpPr txBox="1"/>
           <p:nvPr/>
         </p:nvSpPr>
         <p:spPr>
           <a:xfrm>
-            <a:off x="853418" y="3749039"/>
-            <a:ext cx="6095847" cy="822960"/>
+            <a:off x="822960" y="3886200"/>
+            <a:ext cx="5608179" cy="822960"/>
           </a:xfrm>
           <a:prstGeom prst="rect">
             <a:avLst/>
@@ -3383,9 +3481,9 @@
               </a:lnSpc>
             </a:pPr>
             <a:r>
-              <a:rPr sz="1700" b="0" i="1">
-                <a:solidFill>
-                  <a:srgbClr val="416F1F"/>
+              <a:rPr sz="1700" b="0" i="0">
+                <a:solidFill>
+                  <a:srgbClr val="26231F"/>
                 </a:solidFill>
               </a:rPr>
               <a:t>청보리밭 사이를 뛰어다니던 모습</a:t>
@@ -3395,14 +3493,14 @@
       </p:sp>
       <p:sp>
         <p:nvSpPr>
-          <p:cNvPr id="5" name="안내 문구"/>
+          <p:cNvPr id="7" name="안내 문구"/>
           <p:cNvSpPr txBox="1"/>
           <p:nvPr/>
         </p:nvSpPr>
         <p:spPr>
           <a:xfrm>
-            <a:off x="853418" y="4617720"/>
-            <a:ext cx="6095847" cy="914400"/>
+            <a:off x="822960" y="4754880"/>
+            <a:ext cx="5608179" cy="914400"/>
           </a:xfrm>
           <a:prstGeom prst="rect">
             <a:avLst/>
@@ -3423,10 +3521,10 @@
             <a:r>
               <a:rPr sz="1400" b="0" i="0">
                 <a:solidFill>
-                  <a:srgbClr val="666666"/>
+                  <a:srgbClr val="26231F"/>
                 </a:solidFill>
               </a:rPr>
-              <a:t>반려동물과 함께 · 2027. 00. 00</a:t>
+              <a:t>반려동물과 함께 · 날짜 입력</a:t>
             </a:r>
           </a:p>
         </p:txBody>
@@ -3445,7 +3543,7 @@
     <p:bg>
       <p:bgPr>
         <a:solidFill>
-          <a:srgbClr val="FFFFFF"/>
+          <a:srgbClr val="FBFDFA"/>
         </a:solidFill>
         <a:effectLst/>
       </p:bgPr>
@@ -3465,14 +3563,14 @@
         </p:nvSpPr>
         <p:spPr>
           <a:xfrm>
-            <a:off x="9905695" y="-1463040"/>
-            <a:ext cx="3840480" cy="3840480"/>
-          </a:xfrm>
-          <a:prstGeom prst="ellipse">
+            <a:off x="640080" y="566928"/>
+            <a:ext cx="10911535" cy="10972"/>
+          </a:xfrm>
+          <a:prstGeom prst="rect">
             <a:avLst/>
           </a:prstGeom>
           <a:solidFill>
-            <a:srgbClr val="E3F7D4"/>
+            <a:srgbClr val="26231F"/>
           </a:solidFill>
           <a:ln>
             <a:noFill/>
@@ -3488,20 +3586,58 @@
       </p:sp>
       <p:sp>
         <p:nvSpPr>
-          <p:cNvPr id="4" name="장식"/>
+          <p:cNvPr id="4" name="상단 라벨"/>
+          <p:cNvSpPr txBox="1"/>
+          <p:nvPr/>
+        </p:nvSpPr>
+        <p:spPr>
+          <a:xfrm>
+            <a:off x="640080" y="237744"/>
+            <a:ext cx="5486400" cy="274320"/>
+          </a:xfrm>
+          <a:prstGeom prst="rect">
+            <a:avLst/>
+          </a:prstGeom>
+          <a:noFill/>
+        </p:spPr>
+        <p:txBody>
+          <a:bodyPr wrap="square" lIns="54864" rIns="54864" tIns="27432" bIns="27432" anchor="ctr">
+            <a:noAutofit/>
+          </a:bodyPr>
+          <a:lstStyle/>
+          <a:p>
+            <a:pPr algn="l">
+              <a:lnSpc>
+                <a:spcPct val="115000"/>
+              </a:lnSpc>
+            </a:pPr>
+            <a:r>
+              <a:rPr sz="900" b="1" i="0" spc="250">
+                <a:solidFill>
+                  <a:srgbClr val="26231F"/>
+                </a:solidFill>
+              </a:rPr>
+              <a:t>FAMILY ALBUM</a:t>
+            </a:r>
+          </a:p>
+        </p:txBody>
+      </p:sp>
+      <p:sp>
+        <p:nvSpPr>
+          <p:cNvPr id="5" name="포인트"/>
           <p:cNvSpPr/>
           <p:nvPr/>
         </p:nvSpPr>
         <p:spPr>
           <a:xfrm>
-            <a:off x="11094415" y="274320"/>
-            <a:ext cx="411480" cy="411480"/>
-          </a:xfrm>
-          <a:prstGeom prst="ellipse">
+            <a:off x="11204143" y="246888"/>
+            <a:ext cx="237744" cy="95097"/>
+          </a:xfrm>
+          <a:prstGeom prst="wave">
             <a:avLst/>
           </a:prstGeom>
           <a:solidFill>
-            <a:srgbClr val="82CD4C"/>
+            <a:srgbClr val="BBED97"/>
           </a:solidFill>
           <a:ln>
             <a:noFill/>
@@ -3527,8 +3663,8 @@
         </p:nvSpPr>
         <p:spPr>
           <a:xfrm>
-            <a:off x="640080" y="457200"/>
-            <a:ext cx="9722815" cy="868680"/>
+            <a:off x="640080" y="731520"/>
+            <a:ext cx="10911535" cy="822960"/>
           </a:xfrm>
         </p:spPr>
         <p:txBody>
@@ -3545,7 +3681,7 @@
             <a:r>
               <a:rPr sz="3000" b="1" i="0">
                 <a:solidFill>
-                  <a:srgbClr val="416F1F"/>
+                  <a:srgbClr val="26231F"/>
                 </a:solidFill>
               </a:rPr>
               <a:t>가족 구성원</a:t>
@@ -3555,25 +3691,23 @@
       </p:sp>
       <p:sp>
         <p:nvSpPr>
-          <p:cNvPr id="5" name="사진 자리"/>
+          <p:cNvPr id="6" name="사진 자리"/>
           <p:cNvSpPr/>
           <p:nvPr/>
         </p:nvSpPr>
         <p:spPr>
           <a:xfrm>
-            <a:off x="1182319" y="1600200"/>
-            <a:ext cx="2400300" cy="2400300"/>
+            <a:off x="1239469" y="1783080"/>
+            <a:ext cx="2286000" cy="2286000"/>
           </a:xfrm>
           <a:prstGeom prst="ellipse">
             <a:avLst/>
           </a:prstGeom>
           <a:solidFill>
-            <a:srgbClr val="E3F7D4"/>
+            <a:srgbClr val="E2FAD1"/>
           </a:solidFill>
           <a:ln w="19050">
-            <a:solidFill>
-              <a:srgbClr val="82CD4C"/>
-            </a:solidFill>
+            <a:noFill/>
             <a:prstDash val="dash"/>
           </a:ln>
         </p:spPr>
@@ -3591,7 +3725,7 @@
             <a:r>
               <a:rPr sz="1200" b="0" i="0">
                 <a:solidFill>
-                  <a:srgbClr val="416F1F"/>
+                  <a:srgbClr val="8E8780"/>
                 </a:solidFill>
               </a:rPr>
               <a:t>사진</a:t>
@@ -3601,13 +3735,13 @@
       </p:sp>
       <p:sp>
         <p:nvSpPr>
-          <p:cNvPr id="6" name="TextBox 5"/>
+          <p:cNvPr id="7" name="TextBox 6"/>
           <p:cNvSpPr txBox="1"/>
           <p:nvPr/>
         </p:nvSpPr>
         <p:spPr>
           <a:xfrm>
-            <a:off x="640080" y="4091939"/>
+            <a:off x="640080" y="4160520"/>
             <a:ext cx="3484778" cy="411480"/>
           </a:xfrm>
           <a:prstGeom prst="rect">
@@ -3629,7 +3763,7 @@
             <a:r>
               <a:rPr sz="1600" b="1" i="0">
                 <a:solidFill>
-                  <a:srgbClr val="416F1F"/>
+                  <a:srgbClr val="354927"/>
                 </a:solidFill>
               </a:rPr>
               <a:t>보호자 1</a:t>
@@ -3639,14 +3773,14 @@
       </p:sp>
       <p:sp>
         <p:nvSpPr>
-          <p:cNvPr id="7" name="TextBox 6"/>
+          <p:cNvPr id="8" name="TextBox 7"/>
           <p:cNvSpPr txBox="1"/>
           <p:nvPr/>
         </p:nvSpPr>
         <p:spPr>
           <a:xfrm>
-            <a:off x="731519" y="4549140"/>
-            <a:ext cx="3301898" cy="1851660"/>
+            <a:off x="731519" y="4617720"/>
+            <a:ext cx="3301898" cy="1737360"/>
           </a:xfrm>
           <a:prstGeom prst="rect">
             <a:avLst/>
@@ -3707,25 +3841,23 @@
       </p:sp>
       <p:sp>
         <p:nvSpPr>
-          <p:cNvPr id="8" name="사진 자리"/>
+          <p:cNvPr id="9" name="사진 자리"/>
           <p:cNvSpPr/>
           <p:nvPr/>
         </p:nvSpPr>
         <p:spPr>
           <a:xfrm>
-            <a:off x="4895697" y="1600200"/>
-            <a:ext cx="2400300" cy="2400300"/>
+            <a:off x="4952847" y="1783080"/>
+            <a:ext cx="2286000" cy="2286000"/>
           </a:xfrm>
           <a:prstGeom prst="ellipse">
             <a:avLst/>
           </a:prstGeom>
           <a:solidFill>
-            <a:srgbClr val="E3F7D4"/>
+            <a:srgbClr val="E2FAD1"/>
           </a:solidFill>
           <a:ln w="19050">
-            <a:solidFill>
-              <a:srgbClr val="82CD4C"/>
-            </a:solidFill>
+            <a:noFill/>
             <a:prstDash val="dash"/>
           </a:ln>
         </p:spPr>
@@ -3743,7 +3875,7 @@
             <a:r>
               <a:rPr sz="1200" b="0" i="0">
                 <a:solidFill>
-                  <a:srgbClr val="416F1F"/>
+                  <a:srgbClr val="8E8780"/>
                 </a:solidFill>
               </a:rPr>
               <a:t>사진</a:t>
@@ -3753,13 +3885,13 @@
       </p:sp>
       <p:sp>
         <p:nvSpPr>
-          <p:cNvPr id="9" name="TextBox 8"/>
+          <p:cNvPr id="10" name="TextBox 9"/>
           <p:cNvSpPr txBox="1"/>
           <p:nvPr/>
         </p:nvSpPr>
         <p:spPr>
           <a:xfrm>
-            <a:off x="4353458" y="4091939"/>
+            <a:off x="4353458" y="4160520"/>
             <a:ext cx="3484778" cy="411480"/>
           </a:xfrm>
           <a:prstGeom prst="rect">
@@ -3781,7 +3913,7 @@
             <a:r>
               <a:rPr sz="1600" b="1" i="0">
                 <a:solidFill>
-                  <a:srgbClr val="416F1F"/>
+                  <a:srgbClr val="354927"/>
                 </a:solidFill>
               </a:rPr>
               <a:t>보호자 2</a:t>
@@ -3791,14 +3923,14 @@
       </p:sp>
       <p:sp>
         <p:nvSpPr>
-          <p:cNvPr id="10" name="TextBox 9"/>
+          <p:cNvPr id="11" name="TextBox 10"/>
           <p:cNvSpPr txBox="1"/>
           <p:nvPr/>
         </p:nvSpPr>
         <p:spPr>
           <a:xfrm>
-            <a:off x="4444898" y="4549140"/>
-            <a:ext cx="3301898" cy="1851660"/>
+            <a:off x="4444898" y="4617720"/>
+            <a:ext cx="3301898" cy="1737360"/>
           </a:xfrm>
           <a:prstGeom prst="rect">
             <a:avLst/>
@@ -3859,25 +3991,23 @@
       </p:sp>
       <p:sp>
         <p:nvSpPr>
-          <p:cNvPr id="11" name="사진 자리"/>
+          <p:cNvPr id="12" name="사진 자리"/>
           <p:cNvSpPr/>
           <p:nvPr/>
         </p:nvSpPr>
         <p:spPr>
           <a:xfrm>
-            <a:off x="8609076" y="1600200"/>
-            <a:ext cx="2400300" cy="2400300"/>
+            <a:off x="8666226" y="1783080"/>
+            <a:ext cx="2286000" cy="2286000"/>
           </a:xfrm>
           <a:prstGeom prst="ellipse">
             <a:avLst/>
           </a:prstGeom>
           <a:solidFill>
-            <a:srgbClr val="E3F7D4"/>
+            <a:srgbClr val="E2FAD1"/>
           </a:solidFill>
           <a:ln w="19050">
-            <a:solidFill>
-              <a:srgbClr val="82CD4C"/>
-            </a:solidFill>
+            <a:noFill/>
             <a:prstDash val="dash"/>
           </a:ln>
         </p:spPr>
@@ -3895,7 +4025,7 @@
             <a:r>
               <a:rPr sz="1200" b="0" i="0">
                 <a:solidFill>
-                  <a:srgbClr val="416F1F"/>
+                  <a:srgbClr val="8E8780"/>
                 </a:solidFill>
               </a:rPr>
               <a:t>사진</a:t>
@@ -3905,13 +4035,13 @@
       </p:sp>
       <p:sp>
         <p:nvSpPr>
-          <p:cNvPr id="12" name="TextBox 11"/>
+          <p:cNvPr id="13" name="TextBox 12"/>
           <p:cNvSpPr txBox="1"/>
           <p:nvPr/>
         </p:nvSpPr>
         <p:spPr>
           <a:xfrm>
-            <a:off x="8066836" y="4091939"/>
+            <a:off x="8066836" y="4160520"/>
             <a:ext cx="3484778" cy="411480"/>
           </a:xfrm>
           <a:prstGeom prst="rect">
@@ -3933,7 +4063,7 @@
             <a:r>
               <a:rPr sz="1600" b="1" i="0">
                 <a:solidFill>
-                  <a:srgbClr val="416F1F"/>
+                  <a:srgbClr val="354927"/>
                 </a:solidFill>
               </a:rPr>
               <a:t>우리 반려동물</a:t>
@@ -3943,14 +4073,14 @@
       </p:sp>
       <p:sp>
         <p:nvSpPr>
-          <p:cNvPr id="13" name="TextBox 12"/>
+          <p:cNvPr id="14" name="TextBox 13"/>
           <p:cNvSpPr txBox="1"/>
           <p:nvPr/>
         </p:nvSpPr>
         <p:spPr>
           <a:xfrm>
-            <a:off x="8158276" y="4549140"/>
-            <a:ext cx="3301898" cy="1851660"/>
+            <a:off x="8158276" y="4617720"/>
+            <a:ext cx="3301898" cy="1737360"/>
           </a:xfrm>
           <a:prstGeom prst="rect">
             <a:avLst/>
@@ -4023,7 +4153,7 @@
     <p:bg>
       <p:bgPr>
         <a:solidFill>
-          <a:srgbClr val="FFFFFF"/>
+          <a:srgbClr val="FBFDFA"/>
         </a:solidFill>
         <a:effectLst/>
       </p:bgPr>
@@ -4043,14 +4173,14 @@
         </p:nvSpPr>
         <p:spPr>
           <a:xfrm>
-            <a:off x="9905695" y="-1463040"/>
-            <a:ext cx="3840480" cy="3840480"/>
-          </a:xfrm>
-          <a:prstGeom prst="ellipse">
+            <a:off x="640080" y="566928"/>
+            <a:ext cx="10911535" cy="10972"/>
+          </a:xfrm>
+          <a:prstGeom prst="rect">
             <a:avLst/>
           </a:prstGeom>
           <a:solidFill>
-            <a:srgbClr val="E3F7D4"/>
+            <a:srgbClr val="26231F"/>
           </a:solidFill>
           <a:ln>
             <a:noFill/>
@@ -4066,20 +4196,58 @@
       </p:sp>
       <p:sp>
         <p:nvSpPr>
-          <p:cNvPr id="4" name="장식"/>
+          <p:cNvPr id="4" name="상단 라벨"/>
+          <p:cNvSpPr txBox="1"/>
+          <p:nvPr/>
+        </p:nvSpPr>
+        <p:spPr>
+          <a:xfrm>
+            <a:off x="640080" y="237744"/>
+            <a:ext cx="5486400" cy="274320"/>
+          </a:xfrm>
+          <a:prstGeom prst="rect">
+            <a:avLst/>
+          </a:prstGeom>
+          <a:noFill/>
+        </p:spPr>
+        <p:txBody>
+          <a:bodyPr wrap="square" lIns="54864" rIns="54864" tIns="27432" bIns="27432" anchor="ctr">
+            <a:noAutofit/>
+          </a:bodyPr>
+          <a:lstStyle/>
+          <a:p>
+            <a:pPr algn="l">
+              <a:lnSpc>
+                <a:spcPct val="115000"/>
+              </a:lnSpc>
+            </a:pPr>
+            <a:r>
+              <a:rPr sz="900" b="1" i="0" spc="250">
+                <a:solidFill>
+                  <a:srgbClr val="26231F"/>
+                </a:solidFill>
+              </a:rPr>
+              <a:t>FAMILY ALBUM</a:t>
+            </a:r>
+          </a:p>
+        </p:txBody>
+      </p:sp>
+      <p:sp>
+        <p:nvSpPr>
+          <p:cNvPr id="5" name="포인트"/>
           <p:cNvSpPr/>
           <p:nvPr/>
         </p:nvSpPr>
         <p:spPr>
           <a:xfrm>
-            <a:off x="11094415" y="274320"/>
-            <a:ext cx="411480" cy="411480"/>
-          </a:xfrm>
-          <a:prstGeom prst="ellipse">
+            <a:off x="11204143" y="246888"/>
+            <a:ext cx="237744" cy="95097"/>
+          </a:xfrm>
+          <a:prstGeom prst="wave">
             <a:avLst/>
           </a:prstGeom>
           <a:solidFill>
-            <a:srgbClr val="82CD4C"/>
+            <a:srgbClr val="BBED97"/>
           </a:solidFill>
           <a:ln>
             <a:noFill/>
@@ -4105,8 +4273,8 @@
         </p:nvSpPr>
         <p:spPr>
           <a:xfrm>
-            <a:off x="640080" y="457200"/>
-            <a:ext cx="9722815" cy="868680"/>
+            <a:off x="640080" y="731520"/>
+            <a:ext cx="10911535" cy="822960"/>
           </a:xfrm>
         </p:spPr>
         <p:txBody>
@@ -4123,7 +4291,7 @@
             <a:r>
               <a:rPr sz="3000" b="1" i="0">
                 <a:solidFill>
-                  <a:srgbClr val="416F1F"/>
+                  <a:srgbClr val="26231F"/>
                 </a:solidFill>
               </a:rPr>
               <a:t>우리 가족 이야기</a:t>
@@ -4133,20 +4301,20 @@
       </p:sp>
       <p:sp>
         <p:nvSpPr>
-          <p:cNvPr id="5" name="타임라인 선"/>
+          <p:cNvPr id="6" name="타임라인 선"/>
           <p:cNvSpPr/>
           <p:nvPr/>
         </p:nvSpPr>
         <p:spPr>
           <a:xfrm>
-            <a:off x="640080" y="3337560"/>
+            <a:off x="640080" y="3520440"/>
             <a:ext cx="10911535" cy="54864"/>
           </a:xfrm>
           <a:prstGeom prst="rect">
             <a:avLst/>
           </a:prstGeom>
           <a:solidFill>
-            <a:srgbClr val="E3F7D4"/>
+            <a:srgbClr val="E2FAD1"/>
           </a:solidFill>
           <a:ln>
             <a:noFill/>
@@ -4162,20 +4330,20 @@
       </p:sp>
       <p:sp>
         <p:nvSpPr>
-          <p:cNvPr id="6" name="때 1"/>
+          <p:cNvPr id="7" name="때 1"/>
           <p:cNvSpPr/>
           <p:nvPr/>
         </p:nvSpPr>
         <p:spPr>
           <a:xfrm>
-            <a:off x="1802853" y="3154680"/>
+            <a:off x="1802853" y="3337560"/>
             <a:ext cx="402336" cy="402336"/>
           </a:xfrm>
           <a:prstGeom prst="ellipse">
             <a:avLst/>
           </a:prstGeom>
           <a:solidFill>
-            <a:srgbClr val="82CD4C"/>
+            <a:srgbClr val="BBED97"/>
           </a:solidFill>
           <a:ln w="38100">
             <a:solidFill>
@@ -4193,13 +4361,13 @@
       </p:sp>
       <p:sp>
         <p:nvSpPr>
-          <p:cNvPr id="7" name="TextBox 6"/>
+          <p:cNvPr id="8" name="TextBox 7"/>
           <p:cNvSpPr txBox="1"/>
           <p:nvPr/>
         </p:nvSpPr>
         <p:spPr>
           <a:xfrm>
-            <a:off x="685800" y="2514600"/>
+            <a:off x="685800" y="2697480"/>
             <a:ext cx="2636443" cy="457200"/>
           </a:xfrm>
           <a:prstGeom prst="rect">
@@ -4221,7 +4389,7 @@
             <a:r>
               <a:rPr sz="1600" b="1" i="0">
                 <a:solidFill>
-                  <a:srgbClr val="82CD4C"/>
+                  <a:srgbClr val="BBED97"/>
                 </a:solidFill>
               </a:rPr>
               <a:t>처음 만난 날</a:t>
@@ -4231,13 +4399,13 @@
       </p:sp>
       <p:sp>
         <p:nvSpPr>
-          <p:cNvPr id="8" name="TextBox 7"/>
+          <p:cNvPr id="9" name="TextBox 8"/>
           <p:cNvSpPr txBox="1"/>
           <p:nvPr/>
         </p:nvSpPr>
         <p:spPr>
           <a:xfrm>
-            <a:off x="731519" y="3703320"/>
+            <a:off x="731519" y="3886200"/>
             <a:ext cx="2545003" cy="457200"/>
           </a:xfrm>
           <a:prstGeom prst="rect">
@@ -4259,7 +4427,7 @@
             <a:r>
               <a:rPr sz="1800" b="1" i="0">
                 <a:solidFill>
-                  <a:srgbClr val="416F1F"/>
+                  <a:srgbClr val="354927"/>
                 </a:solidFill>
               </a:rPr>
               <a:t>우리의 인연</a:t>
@@ -4269,13 +4437,13 @@
       </p:sp>
       <p:sp>
         <p:nvSpPr>
-          <p:cNvPr id="9" name="TextBox 8"/>
+          <p:cNvPr id="10" name="TextBox 9"/>
           <p:cNvSpPr txBox="1"/>
           <p:nvPr/>
         </p:nvSpPr>
         <p:spPr>
           <a:xfrm>
-            <a:off x="731519" y="4206240"/>
+            <a:off x="731519" y="4389120"/>
             <a:ext cx="2545003" cy="1645920"/>
           </a:xfrm>
           <a:prstGeom prst="rect">
@@ -4297,7 +4465,7 @@
             <a:r>
               <a:rPr sz="1500" b="0" i="0">
                 <a:solidFill>
-                  <a:srgbClr val="2B2B2B"/>
+                  <a:srgbClr val="26231F"/>
                 </a:solidFill>
               </a:rPr>
               <a:t>입양하던 날의 이야기</a:t>
@@ -4307,20 +4475,20 @@
       </p:sp>
       <p:sp>
         <p:nvSpPr>
-          <p:cNvPr id="10" name="때 2"/>
+          <p:cNvPr id="11" name="때 2"/>
           <p:cNvSpPr/>
           <p:nvPr/>
         </p:nvSpPr>
         <p:spPr>
           <a:xfrm>
-            <a:off x="4530737" y="3154680"/>
+            <a:off x="4530737" y="3337560"/>
             <a:ext cx="402336" cy="402336"/>
           </a:xfrm>
           <a:prstGeom prst="ellipse">
             <a:avLst/>
           </a:prstGeom>
           <a:solidFill>
-            <a:srgbClr val="82CD4C"/>
+            <a:srgbClr val="BBED97"/>
           </a:solidFill>
           <a:ln w="38100">
             <a:solidFill>
@@ -4338,13 +4506,13 @@
       </p:sp>
       <p:sp>
         <p:nvSpPr>
-          <p:cNvPr id="11" name="TextBox 10"/>
+          <p:cNvPr id="12" name="TextBox 11"/>
           <p:cNvSpPr txBox="1"/>
           <p:nvPr/>
         </p:nvSpPr>
         <p:spPr>
           <a:xfrm>
-            <a:off x="3413683" y="2514600"/>
+            <a:off x="3413683" y="2697480"/>
             <a:ext cx="2636443" cy="457200"/>
           </a:xfrm>
           <a:prstGeom prst="rect">
@@ -4366,7 +4534,7 @@
             <a:r>
               <a:rPr sz="1600" b="1" i="0">
                 <a:solidFill>
-                  <a:srgbClr val="82CD4C"/>
+                  <a:srgbClr val="BBED97"/>
                 </a:solidFill>
               </a:rPr>
               <a:t>첫 산책</a:t>
@@ -4376,13 +4544,13 @@
       </p:sp>
       <p:sp>
         <p:nvSpPr>
-          <p:cNvPr id="12" name="TextBox 11"/>
+          <p:cNvPr id="13" name="TextBox 12"/>
           <p:cNvSpPr txBox="1"/>
           <p:nvPr/>
         </p:nvSpPr>
         <p:spPr>
           <a:xfrm>
-            <a:off x="3459403" y="3703320"/>
+            <a:off x="3459403" y="3886200"/>
             <a:ext cx="2545003" cy="457200"/>
           </a:xfrm>
           <a:prstGeom prst="rect">
@@ -4404,7 +4572,7 @@
             <a:r>
               <a:rPr sz="1800" b="1" i="0">
                 <a:solidFill>
-                  <a:srgbClr val="416F1F"/>
+                  <a:srgbClr val="354927"/>
                 </a:solidFill>
               </a:rPr>
               <a:t>함께한 첫 걸음</a:t>
@@ -4414,13 +4582,13 @@
       </p:sp>
       <p:sp>
         <p:nvSpPr>
-          <p:cNvPr id="13" name="TextBox 12"/>
+          <p:cNvPr id="14" name="TextBox 13"/>
           <p:cNvSpPr txBox="1"/>
           <p:nvPr/>
         </p:nvSpPr>
         <p:spPr>
           <a:xfrm>
-            <a:off x="3459403" y="4206240"/>
+            <a:off x="3459403" y="4389120"/>
             <a:ext cx="2545003" cy="1645920"/>
           </a:xfrm>
           <a:prstGeom prst="rect">
@@ -4442,7 +4610,7 @@
             <a:r>
               <a:rPr sz="1500" b="0" i="0">
                 <a:solidFill>
-                  <a:srgbClr val="2B2B2B"/>
+                  <a:srgbClr val="26231F"/>
                 </a:solidFill>
               </a:rPr>
               <a:t>그날의 기억을 적어요</a:t>
@@ -4452,20 +4620,20 @@
       </p:sp>
       <p:sp>
         <p:nvSpPr>
-          <p:cNvPr id="14" name="때 3"/>
+          <p:cNvPr id="15" name="때 3"/>
           <p:cNvSpPr/>
           <p:nvPr/>
         </p:nvSpPr>
         <p:spPr>
           <a:xfrm>
-            <a:off x="7258621" y="3154680"/>
+            <a:off x="7258621" y="3337560"/>
             <a:ext cx="402336" cy="402336"/>
           </a:xfrm>
           <a:prstGeom prst="ellipse">
             <a:avLst/>
           </a:prstGeom>
           <a:solidFill>
-            <a:srgbClr val="82CD4C"/>
+            <a:srgbClr val="BBED97"/>
           </a:solidFill>
           <a:ln w="38100">
             <a:solidFill>
@@ -4483,13 +4651,13 @@
       </p:sp>
       <p:sp>
         <p:nvSpPr>
-          <p:cNvPr id="15" name="TextBox 14"/>
+          <p:cNvPr id="16" name="TextBox 15"/>
           <p:cNvSpPr txBox="1"/>
           <p:nvPr/>
         </p:nvSpPr>
         <p:spPr>
           <a:xfrm>
-            <a:off x="6141567" y="2514600"/>
+            <a:off x="6141567" y="2697480"/>
             <a:ext cx="2636443" cy="457200"/>
           </a:xfrm>
           <a:prstGeom prst="rect">
@@ -4511,7 +4679,7 @@
             <a:r>
               <a:rPr sz="1600" b="1" i="0">
                 <a:solidFill>
-                  <a:srgbClr val="82CD4C"/>
+                  <a:srgbClr val="BBED97"/>
                 </a:solidFill>
               </a:rPr>
               <a:t>가장 웃었던 날</a:t>
@@ -4521,13 +4689,13 @@
       </p:sp>
       <p:sp>
         <p:nvSpPr>
-          <p:cNvPr id="16" name="TextBox 15"/>
+          <p:cNvPr id="17" name="TextBox 16"/>
           <p:cNvSpPr txBox="1"/>
           <p:nvPr/>
         </p:nvSpPr>
         <p:spPr>
           <a:xfrm>
-            <a:off x="6187287" y="3703320"/>
+            <a:off x="6187287" y="3886200"/>
             <a:ext cx="2545003" cy="457200"/>
           </a:xfrm>
           <a:prstGeom prst="rect">
@@ -4549,7 +4717,7 @@
             <a:r>
               <a:rPr sz="1800" b="1" i="0">
                 <a:solidFill>
-                  <a:srgbClr val="416F1F"/>
+                  <a:srgbClr val="354927"/>
                 </a:solidFill>
               </a:rPr>
               <a:t>잊지 못할 순간</a:t>
@@ -4559,13 +4727,13 @@
       </p:sp>
       <p:sp>
         <p:nvSpPr>
-          <p:cNvPr id="17" name="TextBox 16"/>
+          <p:cNvPr id="18" name="TextBox 17"/>
           <p:cNvSpPr txBox="1"/>
           <p:nvPr/>
         </p:nvSpPr>
         <p:spPr>
           <a:xfrm>
-            <a:off x="6187287" y="4206240"/>
+            <a:off x="6187287" y="4389120"/>
             <a:ext cx="2545003" cy="1645920"/>
           </a:xfrm>
           <a:prstGeom prst="rect">
@@ -4587,7 +4755,7 @@
             <a:r>
               <a:rPr sz="1500" b="0" i="0">
                 <a:solidFill>
-                  <a:srgbClr val="2B2B2B"/>
+                  <a:srgbClr val="26231F"/>
                 </a:solidFill>
               </a:rPr>
               <a:t>사진으로 남겨 두세요</a:t>
@@ -4597,20 +4765,20 @@
       </p:sp>
       <p:sp>
         <p:nvSpPr>
-          <p:cNvPr id="18" name="때 4"/>
+          <p:cNvPr id="19" name="때 4"/>
           <p:cNvSpPr/>
           <p:nvPr/>
         </p:nvSpPr>
         <p:spPr>
           <a:xfrm>
-            <a:off x="9986505" y="3154680"/>
+            <a:off x="9986505" y="3337560"/>
             <a:ext cx="402336" cy="402336"/>
           </a:xfrm>
           <a:prstGeom prst="ellipse">
             <a:avLst/>
           </a:prstGeom>
           <a:solidFill>
-            <a:srgbClr val="82CD4C"/>
+            <a:srgbClr val="BBED97"/>
           </a:solidFill>
           <a:ln w="38100">
             <a:solidFill>
@@ -4628,13 +4796,13 @@
       </p:sp>
       <p:sp>
         <p:nvSpPr>
-          <p:cNvPr id="19" name="TextBox 18"/>
+          <p:cNvPr id="20" name="TextBox 19"/>
           <p:cNvSpPr txBox="1"/>
           <p:nvPr/>
         </p:nvSpPr>
         <p:spPr>
           <a:xfrm>
-            <a:off x="8869451" y="2514600"/>
+            <a:off x="8869451" y="2697480"/>
             <a:ext cx="2636443" cy="457200"/>
           </a:xfrm>
           <a:prstGeom prst="rect">
@@ -4656,7 +4824,7 @@
             <a:r>
               <a:rPr sz="1600" b="1" i="0">
                 <a:solidFill>
-                  <a:srgbClr val="82CD4C"/>
+                  <a:srgbClr val="BBED97"/>
                 </a:solidFill>
               </a:rPr>
               <a:t>지금</a:t>
@@ -4666,13 +4834,13 @@
       </p:sp>
       <p:sp>
         <p:nvSpPr>
-          <p:cNvPr id="20" name="TextBox 19"/>
+          <p:cNvPr id="21" name="TextBox 20"/>
           <p:cNvSpPr txBox="1"/>
           <p:nvPr/>
         </p:nvSpPr>
         <p:spPr>
           <a:xfrm>
-            <a:off x="8915171" y="3703320"/>
+            <a:off x="8915171" y="3886200"/>
             <a:ext cx="2545003" cy="457200"/>
           </a:xfrm>
           <a:prstGeom prst="rect">
@@ -4694,7 +4862,7 @@
             <a:r>
               <a:rPr sz="1800" b="1" i="0">
                 <a:solidFill>
-                  <a:srgbClr val="416F1F"/>
+                  <a:srgbClr val="354927"/>
                 </a:solidFill>
               </a:rPr>
               <a:t>오늘의 우리</a:t>
@@ -4704,13 +4872,13 @@
       </p:sp>
       <p:sp>
         <p:nvSpPr>
-          <p:cNvPr id="21" name="TextBox 20"/>
+          <p:cNvPr id="22" name="TextBox 21"/>
           <p:cNvSpPr txBox="1"/>
           <p:nvPr/>
         </p:nvSpPr>
         <p:spPr>
           <a:xfrm>
-            <a:off x="8915171" y="4206240"/>
+            <a:off x="8915171" y="4389120"/>
             <a:ext cx="2545003" cy="1645920"/>
           </a:xfrm>
           <a:prstGeom prst="rect">
@@ -4732,7 +4900,7 @@
             <a:r>
               <a:rPr sz="1500" b="0" i="0">
                 <a:solidFill>
-                  <a:srgbClr val="2B2B2B"/>
+                  <a:srgbClr val="26231F"/>
                 </a:solidFill>
               </a:rPr>
               <a:t>요즘 우리 이야기</a:t>
@@ -4754,7 +4922,7 @@
     <p:bg>
       <p:bgPr>
         <a:solidFill>
-          <a:srgbClr val="FFFFFF"/>
+          <a:srgbClr val="FBFDFA"/>
         </a:solidFill>
         <a:effectLst/>
       </p:bgPr>
@@ -4774,14 +4942,14 @@
         </p:nvSpPr>
         <p:spPr>
           <a:xfrm>
-            <a:off x="9905695" y="-1463040"/>
-            <a:ext cx="3840480" cy="3840480"/>
-          </a:xfrm>
-          <a:prstGeom prst="ellipse">
+            <a:off x="640080" y="566928"/>
+            <a:ext cx="10911535" cy="10972"/>
+          </a:xfrm>
+          <a:prstGeom prst="rect">
             <a:avLst/>
           </a:prstGeom>
           <a:solidFill>
-            <a:srgbClr val="E3F7D4"/>
+            <a:srgbClr val="26231F"/>
           </a:solidFill>
           <a:ln>
             <a:noFill/>
@@ -4797,20 +4965,58 @@
       </p:sp>
       <p:sp>
         <p:nvSpPr>
-          <p:cNvPr id="4" name="장식"/>
+          <p:cNvPr id="4" name="상단 라벨"/>
+          <p:cNvSpPr txBox="1"/>
+          <p:nvPr/>
+        </p:nvSpPr>
+        <p:spPr>
+          <a:xfrm>
+            <a:off x="640080" y="237744"/>
+            <a:ext cx="5486400" cy="274320"/>
+          </a:xfrm>
+          <a:prstGeom prst="rect">
+            <a:avLst/>
+          </a:prstGeom>
+          <a:noFill/>
+        </p:spPr>
+        <p:txBody>
+          <a:bodyPr wrap="square" lIns="54864" rIns="54864" tIns="27432" bIns="27432" anchor="ctr">
+            <a:noAutofit/>
+          </a:bodyPr>
+          <a:lstStyle/>
+          <a:p>
+            <a:pPr algn="l">
+              <a:lnSpc>
+                <a:spcPct val="115000"/>
+              </a:lnSpc>
+            </a:pPr>
+            <a:r>
+              <a:rPr sz="900" b="1" i="0" spc="250">
+                <a:solidFill>
+                  <a:srgbClr val="26231F"/>
+                </a:solidFill>
+              </a:rPr>
+              <a:t>FAMILY ALBUM</a:t>
+            </a:r>
+          </a:p>
+        </p:txBody>
+      </p:sp>
+      <p:sp>
+        <p:nvSpPr>
+          <p:cNvPr id="5" name="포인트"/>
           <p:cNvSpPr/>
           <p:nvPr/>
         </p:nvSpPr>
         <p:spPr>
           <a:xfrm>
-            <a:off x="11094415" y="274320"/>
-            <a:ext cx="411480" cy="411480"/>
-          </a:xfrm>
-          <a:prstGeom prst="ellipse">
+            <a:off x="11204143" y="246888"/>
+            <a:ext cx="237744" cy="95097"/>
+          </a:xfrm>
+          <a:prstGeom prst="wave">
             <a:avLst/>
           </a:prstGeom>
           <a:solidFill>
-            <a:srgbClr val="82CD4C"/>
+            <a:srgbClr val="BBED97"/>
           </a:solidFill>
           <a:ln>
             <a:noFill/>
@@ -4836,8 +5042,8 @@
         </p:nvSpPr>
         <p:spPr>
           <a:xfrm>
-            <a:off x="640080" y="457200"/>
-            <a:ext cx="9722815" cy="868680"/>
+            <a:off x="640080" y="731520"/>
+            <a:ext cx="10911535" cy="822960"/>
           </a:xfrm>
         </p:spPr>
         <p:txBody>
@@ -4854,7 +5060,7 @@
             <a:r>
               <a:rPr sz="3000" b="1" i="0">
                 <a:solidFill>
-                  <a:srgbClr val="416F1F"/>
+                  <a:srgbClr val="26231F"/>
                 </a:solidFill>
               </a:rPr>
               <a:t>우리 가족의 약속</a:t>
@@ -4864,27 +5070,25 @@
       </p:sp>
       <p:sp>
         <p:nvSpPr>
-          <p:cNvPr id="5" name="줄 1"/>
+          <p:cNvPr id="6" name="줄 1"/>
           <p:cNvSpPr/>
           <p:nvPr/>
         </p:nvSpPr>
         <p:spPr>
           <a:xfrm>
-            <a:off x="640080" y="1600200"/>
+            <a:off x="640080" y="1783080"/>
             <a:ext cx="10911535" cy="1005840"/>
           </a:xfrm>
           <a:prstGeom prst="roundRect">
             <a:avLst>
-              <a:gd name="adj" fmla="val 8000"/>
+              <a:gd name="adj" fmla="val 4000"/>
             </a:avLst>
           </a:prstGeom>
           <a:solidFill>
-            <a:srgbClr val="F7FCF3"/>
+            <a:srgbClr val="F2FDEA"/>
           </a:solidFill>
-          <a:ln w="12700">
-            <a:solidFill>
-              <a:srgbClr val="E3F7D4"/>
-            </a:solidFill>
+          <a:ln>
+            <a:noFill/>
           </a:ln>
         </p:spPr>
         <p:txBody>
@@ -4897,20 +5101,49 @@
       </p:sp>
       <p:sp>
         <p:nvSpPr>
-          <p:cNvPr id="6" name="번호 1"/>
+          <p:cNvPr id="7" name="포인트 막대"/>
           <p:cNvSpPr/>
           <p:nvPr/>
         </p:nvSpPr>
         <p:spPr>
           <a:xfrm>
-            <a:off x="822959" y="1874519"/>
+            <a:off x="640080" y="1892807"/>
+            <a:ext cx="54864" cy="786384"/>
+          </a:xfrm>
+          <a:prstGeom prst="rect">
+            <a:avLst/>
+          </a:prstGeom>
+          <a:solidFill>
+            <a:srgbClr val="BBED97"/>
+          </a:solidFill>
+          <a:ln>
+            <a:noFill/>
+          </a:ln>
+        </p:spPr>
+        <p:txBody>
+          <a:bodyPr rtlCol="0" anchor="ctr"/>
+          <a:lstStyle/>
+          <a:p>
+            <a:pPr algn="ctr"/>
+          </a:p>
+        </p:txBody>
+      </p:sp>
+      <p:sp>
+        <p:nvSpPr>
+          <p:cNvPr id="8" name="번호 1"/>
+          <p:cNvSpPr/>
+          <p:nvPr/>
+        </p:nvSpPr>
+        <p:spPr>
+          <a:xfrm>
+            <a:off x="822959" y="2057400"/>
             <a:ext cx="457200" cy="457200"/>
           </a:xfrm>
           <a:prstGeom prst="ellipse">
             <a:avLst/>
           </a:prstGeom>
           <a:solidFill>
-            <a:srgbClr val="82CD4C"/>
+            <a:srgbClr val="BBED97"/>
           </a:solidFill>
           <a:ln>
             <a:noFill/>
@@ -4930,7 +5163,7 @@
             <a:r>
               <a:rPr sz="1600" b="1" i="0">
                 <a:solidFill>
-                  <a:srgbClr val="FFFFFF"/>
+                  <a:srgbClr val="26231F"/>
                 </a:solidFill>
               </a:rPr>
               <a:t>1</a:t>
@@ -4940,13 +5173,13 @@
       </p:sp>
       <p:sp>
         <p:nvSpPr>
-          <p:cNvPr id="7" name="TextBox 6"/>
+          <p:cNvPr id="9" name="TextBox 8"/>
           <p:cNvSpPr txBox="1"/>
           <p:nvPr/>
         </p:nvSpPr>
         <p:spPr>
           <a:xfrm>
-            <a:off x="1508760" y="1645920"/>
+            <a:off x="1508760" y="1828800"/>
             <a:ext cx="2743200" cy="914400"/>
           </a:xfrm>
           <a:prstGeom prst="rect">
@@ -4968,7 +5201,7 @@
             <a:r>
               <a:rPr sz="1800" b="1" i="0">
                 <a:solidFill>
-                  <a:srgbClr val="416F1F"/>
+                  <a:srgbClr val="354927"/>
                 </a:solidFill>
               </a:rPr>
               <a:t>약속 1</a:t>
@@ -4978,13 +5211,13 @@
       </p:sp>
       <p:sp>
         <p:nvSpPr>
-          <p:cNvPr id="8" name="TextBox 7"/>
+          <p:cNvPr id="10" name="TextBox 9"/>
           <p:cNvSpPr txBox="1"/>
           <p:nvPr/>
         </p:nvSpPr>
         <p:spPr>
           <a:xfrm>
-            <a:off x="4297680" y="1645920"/>
+            <a:off x="4297680" y="1828800"/>
             <a:ext cx="7071055" cy="914400"/>
           </a:xfrm>
           <a:prstGeom prst="rect">
@@ -5006,7 +5239,7 @@
             <a:r>
               <a:rPr sz="1700" b="0" i="0">
                 <a:solidFill>
-                  <a:srgbClr val="2B2B2B"/>
+                  <a:srgbClr val="26231F"/>
                 </a:solidFill>
               </a:rPr>
               <a:t>산책은 하루도 거르지 않기</a:t>
@@ -5016,27 +5249,25 @@
       </p:sp>
       <p:sp>
         <p:nvSpPr>
-          <p:cNvPr id="9" name="줄 2"/>
+          <p:cNvPr id="11" name="줄 2"/>
           <p:cNvSpPr/>
           <p:nvPr/>
         </p:nvSpPr>
         <p:spPr>
           <a:xfrm>
-            <a:off x="640080" y="2743200"/>
+            <a:off x="640080" y="2926080"/>
             <a:ext cx="10911535" cy="1005840"/>
           </a:xfrm>
           <a:prstGeom prst="roundRect">
             <a:avLst>
-              <a:gd name="adj" fmla="val 8000"/>
+              <a:gd name="adj" fmla="val 4000"/>
             </a:avLst>
           </a:prstGeom>
           <a:solidFill>
-            <a:srgbClr val="F7FCF3"/>
+            <a:srgbClr val="F2FDEA"/>
           </a:solidFill>
-          <a:ln w="12700">
-            <a:solidFill>
-              <a:srgbClr val="E3F7D4"/>
-            </a:solidFill>
+          <a:ln>
+            <a:noFill/>
           </a:ln>
         </p:spPr>
         <p:txBody>
@@ -5049,20 +5280,49 @@
       </p:sp>
       <p:sp>
         <p:nvSpPr>
-          <p:cNvPr id="10" name="번호 2"/>
+          <p:cNvPr id="12" name="포인트 막대"/>
           <p:cNvSpPr/>
           <p:nvPr/>
         </p:nvSpPr>
         <p:spPr>
           <a:xfrm>
-            <a:off x="822959" y="3017520"/>
+            <a:off x="640080" y="3035808"/>
+            <a:ext cx="54864" cy="786384"/>
+          </a:xfrm>
+          <a:prstGeom prst="rect">
+            <a:avLst/>
+          </a:prstGeom>
+          <a:solidFill>
+            <a:srgbClr val="BBED97"/>
+          </a:solidFill>
+          <a:ln>
+            <a:noFill/>
+          </a:ln>
+        </p:spPr>
+        <p:txBody>
+          <a:bodyPr rtlCol="0" anchor="ctr"/>
+          <a:lstStyle/>
+          <a:p>
+            <a:pPr algn="ctr"/>
+          </a:p>
+        </p:txBody>
+      </p:sp>
+      <p:sp>
+        <p:nvSpPr>
+          <p:cNvPr id="13" name="번호 2"/>
+          <p:cNvSpPr/>
+          <p:nvPr/>
+        </p:nvSpPr>
+        <p:spPr>
+          <a:xfrm>
+            <a:off x="822959" y="3200400"/>
             <a:ext cx="457200" cy="457200"/>
           </a:xfrm>
           <a:prstGeom prst="ellipse">
             <a:avLst/>
           </a:prstGeom>
           <a:solidFill>
-            <a:srgbClr val="82CD4C"/>
+            <a:srgbClr val="BBED97"/>
           </a:solidFill>
           <a:ln>
             <a:noFill/>
@@ -5082,7 +5342,7 @@
             <a:r>
               <a:rPr sz="1600" b="1" i="0">
                 <a:solidFill>
-                  <a:srgbClr val="FFFFFF"/>
+                  <a:srgbClr val="26231F"/>
                 </a:solidFill>
               </a:rPr>
               <a:t>2</a:t>
@@ -5092,13 +5352,13 @@
       </p:sp>
       <p:sp>
         <p:nvSpPr>
-          <p:cNvPr id="11" name="TextBox 10"/>
+          <p:cNvPr id="14" name="TextBox 13"/>
           <p:cNvSpPr txBox="1"/>
           <p:nvPr/>
         </p:nvSpPr>
         <p:spPr>
           <a:xfrm>
-            <a:off x="1508760" y="2788920"/>
+            <a:off x="1508760" y="2971800"/>
             <a:ext cx="2743200" cy="914400"/>
           </a:xfrm>
           <a:prstGeom prst="rect">
@@ -5120,7 +5380,7 @@
             <a:r>
               <a:rPr sz="1800" b="1" i="0">
                 <a:solidFill>
-                  <a:srgbClr val="416F1F"/>
+                  <a:srgbClr val="354927"/>
                 </a:solidFill>
               </a:rPr>
               <a:t>약속 2</a:t>
@@ -5130,13 +5390,13 @@
       </p:sp>
       <p:sp>
         <p:nvSpPr>
-          <p:cNvPr id="12" name="TextBox 11"/>
+          <p:cNvPr id="15" name="TextBox 14"/>
           <p:cNvSpPr txBox="1"/>
           <p:nvPr/>
         </p:nvSpPr>
         <p:spPr>
           <a:xfrm>
-            <a:off x="4297680" y="2788920"/>
+            <a:off x="4297680" y="2971800"/>
             <a:ext cx="7071055" cy="914400"/>
           </a:xfrm>
           <a:prstGeom prst="rect">
@@ -5158,7 +5418,7 @@
             <a:r>
               <a:rPr sz="1700" b="0" i="0">
                 <a:solidFill>
-                  <a:srgbClr val="2B2B2B"/>
+                  <a:srgbClr val="26231F"/>
                 </a:solidFill>
               </a:rPr>
               <a:t>건강 검진 날짜 챙기기</a:t>
@@ -5168,27 +5428,25 @@
       </p:sp>
       <p:sp>
         <p:nvSpPr>
-          <p:cNvPr id="13" name="줄 3"/>
+          <p:cNvPr id="16" name="줄 3"/>
           <p:cNvSpPr/>
           <p:nvPr/>
         </p:nvSpPr>
         <p:spPr>
           <a:xfrm>
-            <a:off x="640080" y="3886200"/>
+            <a:off x="640080" y="4069080"/>
             <a:ext cx="10911535" cy="1005840"/>
           </a:xfrm>
           <a:prstGeom prst="roundRect">
             <a:avLst>
-              <a:gd name="adj" fmla="val 8000"/>
+              <a:gd name="adj" fmla="val 4000"/>
             </a:avLst>
           </a:prstGeom>
           <a:solidFill>
-            <a:srgbClr val="F7FCF3"/>
+            <a:srgbClr val="F2FDEA"/>
           </a:solidFill>
-          <a:ln w="12700">
-            <a:solidFill>
-              <a:srgbClr val="E3F7D4"/>
-            </a:solidFill>
+          <a:ln>
+            <a:noFill/>
           </a:ln>
         </p:spPr>
         <p:txBody>
@@ -5201,20 +5459,49 @@
       </p:sp>
       <p:sp>
         <p:nvSpPr>
-          <p:cNvPr id="14" name="번호 3"/>
+          <p:cNvPr id="17" name="포인트 막대"/>
           <p:cNvSpPr/>
           <p:nvPr/>
         </p:nvSpPr>
         <p:spPr>
           <a:xfrm>
-            <a:off x="822959" y="4160520"/>
+            <a:off x="640080" y="4178808"/>
+            <a:ext cx="54864" cy="786384"/>
+          </a:xfrm>
+          <a:prstGeom prst="rect">
+            <a:avLst/>
+          </a:prstGeom>
+          <a:solidFill>
+            <a:srgbClr val="BBED97"/>
+          </a:solidFill>
+          <a:ln>
+            <a:noFill/>
+          </a:ln>
+        </p:spPr>
+        <p:txBody>
+          <a:bodyPr rtlCol="0" anchor="ctr"/>
+          <a:lstStyle/>
+          <a:p>
+            <a:pPr algn="ctr"/>
+          </a:p>
+        </p:txBody>
+      </p:sp>
+      <p:sp>
+        <p:nvSpPr>
+          <p:cNvPr id="18" name="번호 3"/>
+          <p:cNvSpPr/>
+          <p:nvPr/>
+        </p:nvSpPr>
+        <p:spPr>
+          <a:xfrm>
+            <a:off x="822959" y="4343400"/>
             <a:ext cx="457200" cy="457200"/>
           </a:xfrm>
           <a:prstGeom prst="ellipse">
             <a:avLst/>
           </a:prstGeom>
           <a:solidFill>
-            <a:srgbClr val="82CD4C"/>
+            <a:srgbClr val="BBED97"/>
           </a:solidFill>
           <a:ln>
             <a:noFill/>
@@ -5234,7 +5521,7 @@
             <a:r>
               <a:rPr sz="1600" b="1" i="0">
                 <a:solidFill>
-                  <a:srgbClr val="FFFFFF"/>
+                  <a:srgbClr val="26231F"/>
                 </a:solidFill>
               </a:rPr>
               <a:t>3</a:t>
@@ -5244,13 +5531,13 @@
       </p:sp>
       <p:sp>
         <p:nvSpPr>
-          <p:cNvPr id="15" name="TextBox 14"/>
+          <p:cNvPr id="19" name="TextBox 18"/>
           <p:cNvSpPr txBox="1"/>
           <p:nvPr/>
         </p:nvSpPr>
         <p:spPr>
           <a:xfrm>
-            <a:off x="1508760" y="3931920"/>
+            <a:off x="1508760" y="4114800"/>
             <a:ext cx="2743200" cy="914400"/>
           </a:xfrm>
           <a:prstGeom prst="rect">
@@ -5272,7 +5559,7 @@
             <a:r>
               <a:rPr sz="1800" b="1" i="0">
                 <a:solidFill>
-                  <a:srgbClr val="416F1F"/>
+                  <a:srgbClr val="354927"/>
                 </a:solidFill>
               </a:rPr>
               <a:t>약속 3</a:t>
@@ -5282,13 +5569,13 @@
       </p:sp>
       <p:sp>
         <p:nvSpPr>
-          <p:cNvPr id="16" name="TextBox 15"/>
+          <p:cNvPr id="20" name="TextBox 19"/>
           <p:cNvSpPr txBox="1"/>
           <p:nvPr/>
         </p:nvSpPr>
         <p:spPr>
           <a:xfrm>
-            <a:off x="4297680" y="3931920"/>
+            <a:off x="4297680" y="4114800"/>
             <a:ext cx="7071055" cy="914400"/>
           </a:xfrm>
           <a:prstGeom prst="rect">
@@ -5310,7 +5597,7 @@
             <a:r>
               <a:rPr sz="1700" b="0" i="0">
                 <a:solidFill>
-                  <a:srgbClr val="2B2B2B"/>
+                  <a:srgbClr val="26231F"/>
                 </a:solidFill>
               </a:rPr>
               <a:t>많이 안아 주고 많이 칭찬하기</a:t>
@@ -5332,7 +5619,7 @@
     <p:bg>
       <p:bgPr>
         <a:solidFill>
-          <a:srgbClr val="FFFFFF"/>
+          <a:srgbClr val="FBFDFA"/>
         </a:solidFill>
         <a:effectLst/>
       </p:bgPr>
@@ -5352,14 +5639,14 @@
         </p:nvSpPr>
         <p:spPr>
           <a:xfrm>
-            <a:off x="9905695" y="-1463040"/>
-            <a:ext cx="3840480" cy="3840480"/>
-          </a:xfrm>
-          <a:prstGeom prst="ellipse">
+            <a:off x="640080" y="566928"/>
+            <a:ext cx="10911535" cy="10972"/>
+          </a:xfrm>
+          <a:prstGeom prst="rect">
             <a:avLst/>
           </a:prstGeom>
           <a:solidFill>
-            <a:srgbClr val="E3F7D4"/>
+            <a:srgbClr val="26231F"/>
           </a:solidFill>
           <a:ln>
             <a:noFill/>
@@ -5375,20 +5662,58 @@
       </p:sp>
       <p:sp>
         <p:nvSpPr>
-          <p:cNvPr id="4" name="장식"/>
+          <p:cNvPr id="4" name="상단 라벨"/>
+          <p:cNvSpPr txBox="1"/>
+          <p:nvPr/>
+        </p:nvSpPr>
+        <p:spPr>
+          <a:xfrm>
+            <a:off x="640080" y="237744"/>
+            <a:ext cx="5486400" cy="274320"/>
+          </a:xfrm>
+          <a:prstGeom prst="rect">
+            <a:avLst/>
+          </a:prstGeom>
+          <a:noFill/>
+        </p:spPr>
+        <p:txBody>
+          <a:bodyPr wrap="square" lIns="54864" rIns="54864" tIns="27432" bIns="27432" anchor="ctr">
+            <a:noAutofit/>
+          </a:bodyPr>
+          <a:lstStyle/>
+          <a:p>
+            <a:pPr algn="l">
+              <a:lnSpc>
+                <a:spcPct val="115000"/>
+              </a:lnSpc>
+            </a:pPr>
+            <a:r>
+              <a:rPr sz="900" b="1" i="0" spc="250">
+                <a:solidFill>
+                  <a:srgbClr val="26231F"/>
+                </a:solidFill>
+              </a:rPr>
+              <a:t>FAMILY ALBUM</a:t>
+            </a:r>
+          </a:p>
+        </p:txBody>
+      </p:sp>
+      <p:sp>
+        <p:nvSpPr>
+          <p:cNvPr id="5" name="포인트"/>
           <p:cNvSpPr/>
           <p:nvPr/>
         </p:nvSpPr>
         <p:spPr>
           <a:xfrm>
-            <a:off x="11094415" y="274320"/>
-            <a:ext cx="411480" cy="411480"/>
-          </a:xfrm>
-          <a:prstGeom prst="ellipse">
+            <a:off x="11204143" y="246888"/>
+            <a:ext cx="237744" cy="95097"/>
+          </a:xfrm>
+          <a:prstGeom prst="wave">
             <a:avLst/>
           </a:prstGeom>
           <a:solidFill>
-            <a:srgbClr val="82CD4C"/>
+            <a:srgbClr val="BBED97"/>
           </a:solidFill>
           <a:ln>
             <a:noFill/>
@@ -5414,8 +5739,8 @@
         </p:nvSpPr>
         <p:spPr>
           <a:xfrm>
-            <a:off x="640080" y="457200"/>
-            <a:ext cx="9722815" cy="868680"/>
+            <a:off x="640080" y="731520"/>
+            <a:ext cx="10911535" cy="822960"/>
           </a:xfrm>
         </p:spPr>
         <p:txBody>
@@ -5432,7 +5757,7 @@
             <a:r>
               <a:rPr sz="3000" b="1" i="0">
                 <a:solidFill>
-                  <a:srgbClr val="416F1F"/>
+                  <a:srgbClr val="26231F"/>
                 </a:solidFill>
               </a:rPr>
               <a:t>가족 사진</a:t>
@@ -5442,14 +5767,14 @@
       </p:sp>
       <p:sp>
         <p:nvSpPr>
-          <p:cNvPr id="5" name="사진 자리"/>
+          <p:cNvPr id="6" name="사진 자리"/>
           <p:cNvSpPr/>
           <p:nvPr/>
         </p:nvSpPr>
         <p:spPr>
           <a:xfrm>
-            <a:off x="640080" y="1600200"/>
-            <a:ext cx="3515258" cy="2308860"/>
+            <a:off x="640080" y="1783080"/>
+            <a:ext cx="3515258" cy="2194560"/>
           </a:xfrm>
           <a:prstGeom prst="roundRect">
             <a:avLst>
@@ -5457,12 +5782,10 @@
             </a:avLst>
           </a:prstGeom>
           <a:solidFill>
-            <a:srgbClr val="E3F7D4"/>
+            <a:srgbClr val="E2FAD1"/>
           </a:solidFill>
           <a:ln w="19050">
-            <a:solidFill>
-              <a:srgbClr val="82CD4C"/>
-            </a:solidFill>
+            <a:noFill/>
             <a:prstDash val="dash"/>
           </a:ln>
         </p:spPr>
@@ -5480,7 +5803,7 @@
             <a:r>
               <a:rPr sz="1200" b="0" i="0">
                 <a:solidFill>
-                  <a:srgbClr val="416F1F"/>
+                  <a:srgbClr val="8E8780"/>
                 </a:solidFill>
               </a:rPr>
               <a:t>사진 1</a:t>
@@ -5490,14 +5813,14 @@
       </p:sp>
       <p:sp>
         <p:nvSpPr>
-          <p:cNvPr id="6" name="사진 자리"/>
+          <p:cNvPr id="7" name="사진 자리"/>
           <p:cNvSpPr/>
           <p:nvPr/>
         </p:nvSpPr>
         <p:spPr>
           <a:xfrm>
-            <a:off x="4338218" y="1600200"/>
-            <a:ext cx="3515258" cy="2308860"/>
+            <a:off x="4338218" y="1783080"/>
+            <a:ext cx="3515258" cy="2194560"/>
           </a:xfrm>
           <a:prstGeom prst="roundRect">
             <a:avLst>
@@ -5505,12 +5828,10 @@
             </a:avLst>
           </a:prstGeom>
           <a:solidFill>
-            <a:srgbClr val="E3F7D4"/>
+            <a:srgbClr val="E2FAD1"/>
           </a:solidFill>
           <a:ln w="19050">
-            <a:solidFill>
-              <a:srgbClr val="82CD4C"/>
-            </a:solidFill>
+            <a:noFill/>
             <a:prstDash val="dash"/>
           </a:ln>
         </p:spPr>
@@ -5528,7 +5849,7 @@
             <a:r>
               <a:rPr sz="1200" b="0" i="0">
                 <a:solidFill>
-                  <a:srgbClr val="416F1F"/>
+                  <a:srgbClr val="8E8780"/>
                 </a:solidFill>
               </a:rPr>
               <a:t>사진 2</a:t>
@@ -5538,14 +5859,14 @@
       </p:sp>
       <p:sp>
         <p:nvSpPr>
-          <p:cNvPr id="7" name="사진 자리"/>
+          <p:cNvPr id="8" name="사진 자리"/>
           <p:cNvSpPr/>
           <p:nvPr/>
         </p:nvSpPr>
         <p:spPr>
           <a:xfrm>
-            <a:off x="8036356" y="1600200"/>
-            <a:ext cx="3515258" cy="2308860"/>
+            <a:off x="8036356" y="1783080"/>
+            <a:ext cx="3515258" cy="2194560"/>
           </a:xfrm>
           <a:prstGeom prst="roundRect">
             <a:avLst>
@@ -5553,12 +5874,10 @@
             </a:avLst>
           </a:prstGeom>
           <a:solidFill>
-            <a:srgbClr val="E3F7D4"/>
+            <a:srgbClr val="E2FAD1"/>
           </a:solidFill>
           <a:ln w="19050">
-            <a:solidFill>
-              <a:srgbClr val="82CD4C"/>
-            </a:solidFill>
+            <a:noFill/>
             <a:prstDash val="dash"/>
           </a:ln>
         </p:spPr>
@@ -5576,7 +5895,7 @@
             <a:r>
               <a:rPr sz="1200" b="0" i="0">
                 <a:solidFill>
-                  <a:srgbClr val="416F1F"/>
+                  <a:srgbClr val="8E8780"/>
                 </a:solidFill>
               </a:rPr>
               <a:t>사진 3</a:t>
@@ -5586,14 +5905,14 @@
       </p:sp>
       <p:sp>
         <p:nvSpPr>
-          <p:cNvPr id="8" name="사진 자리"/>
+          <p:cNvPr id="9" name="사진 자리"/>
           <p:cNvSpPr/>
           <p:nvPr/>
         </p:nvSpPr>
         <p:spPr>
           <a:xfrm>
-            <a:off x="640080" y="4091939"/>
-            <a:ext cx="3515258" cy="2308860"/>
+            <a:off x="640080" y="4160520"/>
+            <a:ext cx="3515258" cy="2194560"/>
           </a:xfrm>
           <a:prstGeom prst="roundRect">
             <a:avLst>
@@ -5601,12 +5920,10 @@
             </a:avLst>
           </a:prstGeom>
           <a:solidFill>
-            <a:srgbClr val="E3F7D4"/>
+            <a:srgbClr val="E2FAD1"/>
           </a:solidFill>
           <a:ln w="19050">
-            <a:solidFill>
-              <a:srgbClr val="82CD4C"/>
-            </a:solidFill>
+            <a:noFill/>
             <a:prstDash val="dash"/>
           </a:ln>
         </p:spPr>
@@ -5624,7 +5941,7 @@
             <a:r>
               <a:rPr sz="1200" b="0" i="0">
                 <a:solidFill>
-                  <a:srgbClr val="416F1F"/>
+                  <a:srgbClr val="8E8780"/>
                 </a:solidFill>
               </a:rPr>
               <a:t>사진 4</a:t>
@@ -5634,14 +5951,14 @@
       </p:sp>
       <p:sp>
         <p:nvSpPr>
-          <p:cNvPr id="9" name="사진 자리"/>
+          <p:cNvPr id="10" name="사진 자리"/>
           <p:cNvSpPr/>
           <p:nvPr/>
         </p:nvSpPr>
         <p:spPr>
           <a:xfrm>
-            <a:off x="4338218" y="4091939"/>
-            <a:ext cx="3515258" cy="2308860"/>
+            <a:off x="4338218" y="4160520"/>
+            <a:ext cx="3515258" cy="2194560"/>
           </a:xfrm>
           <a:prstGeom prst="roundRect">
             <a:avLst>
@@ -5649,12 +5966,10 @@
             </a:avLst>
           </a:prstGeom>
           <a:solidFill>
-            <a:srgbClr val="E3F7D4"/>
+            <a:srgbClr val="E2FAD1"/>
           </a:solidFill>
           <a:ln w="19050">
-            <a:solidFill>
-              <a:srgbClr val="82CD4C"/>
-            </a:solidFill>
+            <a:noFill/>
             <a:prstDash val="dash"/>
           </a:ln>
         </p:spPr>
@@ -5672,7 +5987,7 @@
             <a:r>
               <a:rPr sz="1200" b="0" i="0">
                 <a:solidFill>
-                  <a:srgbClr val="416F1F"/>
+                  <a:srgbClr val="8E8780"/>
                 </a:solidFill>
               </a:rPr>
               <a:t>사진 5</a:t>
@@ -5682,14 +5997,14 @@
       </p:sp>
       <p:sp>
         <p:nvSpPr>
-          <p:cNvPr id="10" name="사진 자리"/>
+          <p:cNvPr id="11" name="사진 자리"/>
           <p:cNvSpPr/>
           <p:nvPr/>
         </p:nvSpPr>
         <p:spPr>
           <a:xfrm>
-            <a:off x="8036356" y="4091939"/>
-            <a:ext cx="3515258" cy="2308860"/>
+            <a:off x="8036356" y="4160520"/>
+            <a:ext cx="3515258" cy="2194560"/>
           </a:xfrm>
           <a:prstGeom prst="roundRect">
             <a:avLst>
@@ -5697,12 +6012,10 @@
             </a:avLst>
           </a:prstGeom>
           <a:solidFill>
-            <a:srgbClr val="E3F7D4"/>
+            <a:srgbClr val="E2FAD1"/>
           </a:solidFill>
           <a:ln w="19050">
-            <a:solidFill>
-              <a:srgbClr val="82CD4C"/>
-            </a:solidFill>
+            <a:noFill/>
             <a:prstDash val="dash"/>
           </a:ln>
         </p:spPr>
@@ -5720,7 +6033,7 @@
             <a:r>
               <a:rPr sz="1200" b="0" i="0">
                 <a:solidFill>
-                  <a:srgbClr val="416F1F"/>
+                  <a:srgbClr val="8E8780"/>
                 </a:solidFill>
               </a:rPr>
               <a:t>사진 6</a:t>
@@ -5739,6 +6052,14 @@
 <file path=ppt/slides/slide6.xml><?xml version="1.0" encoding="utf-8"?>
 <p:sld xmlns:a="http://schemas.openxmlformats.org/drawingml/2006/main" xmlns:p="http://schemas.openxmlformats.org/presentationml/2006/main" xmlns:r="http://schemas.openxmlformats.org/officeDocument/2006/relationships">
   <p:cSld>
+    <p:bg>
+      <p:bgPr>
+        <a:solidFill>
+          <a:srgbClr val="F2FDEA"/>
+        </a:solidFill>
+        <a:effectLst/>
+      </p:bgPr>
+    </p:bg>
     <p:spTree>
       <p:nvGrpSpPr>
         <p:cNvPr id="1" name=""/>
@@ -5746,30 +6067,120 @@
         <p:nvPr/>
       </p:nvGrpSpPr>
       <p:grpSpPr/>
-      <p:pic>
-        <p:nvPicPr>
-          <p:cNvPr id="3" name="표지 그림" descr="family-05.jpg"/>
-          <p:cNvPicPr>
-            <a:picLocks noChangeAspect="1"/>
-          </p:cNvPicPr>
-          <p:nvPr/>
-        </p:nvPicPr>
-        <p:blipFill>
-          <a:blip r:embed="rId2"/>
-          <a:stretch>
-            <a:fillRect/>
-          </a:stretch>
-        </p:blipFill>
-        <p:spPr>
-          <a:xfrm>
-            <a:off x="0" y="0"/>
-            <a:ext cx="12191695" cy="6858000"/>
+      <p:sp>
+        <p:nvSpPr>
+          <p:cNvPr id="3" name="사진 자리"/>
+          <p:cNvSpPr/>
+          <p:nvPr/>
+        </p:nvSpPr>
+        <p:spPr>
+          <a:xfrm>
+            <a:off x="7071183" y="960120"/>
+            <a:ext cx="3657508" cy="4526280"/>
+          </a:xfrm>
+          <a:prstGeom prst="roundRect">
+            <a:avLst>
+              <a:gd name="adj" fmla="val 4000"/>
+            </a:avLst>
+          </a:prstGeom>
+          <a:solidFill>
+            <a:srgbClr val="C6F2A6"/>
+          </a:solidFill>
+          <a:ln>
+            <a:noFill/>
+          </a:ln>
+        </p:spPr>
+        <p:txBody>
+          <a:bodyPr rtlCol="0" anchor="ctr" wrap="square" lIns="54864" rIns="54864" tIns="27432" bIns="27432">
+            <a:noAutofit/>
+          </a:bodyPr>
+          <a:lstStyle/>
+          <a:p>
+            <a:pPr algn="ctr">
+              <a:lnSpc>
+                <a:spcPct val="100000"/>
+              </a:lnSpc>
+            </a:pPr>
+            <a:r>
+              <a:rPr sz="1400" b="0" i="0">
+                <a:solidFill>
+                  <a:srgbClr val="354927"/>
+                </a:solidFill>
+              </a:rPr>
+              <a:t>사진을 넣어 주세요</a:t>
+            </a:r>
+          </a:p>
+        </p:txBody>
+      </p:sp>
+      <p:sp>
+        <p:nvSpPr>
+          <p:cNvPr id="4" name="장식"/>
+          <p:cNvSpPr/>
+          <p:nvPr/>
+        </p:nvSpPr>
+        <p:spPr>
+          <a:xfrm>
+            <a:off x="7558851" y="1234439"/>
+            <a:ext cx="3657508" cy="4526280"/>
+          </a:xfrm>
+          <a:prstGeom prst="roundRect">
+            <a:avLst>
+              <a:gd name="adj" fmla="val 4000"/>
+            </a:avLst>
+          </a:prstGeom>
+          <a:noFill/>
+          <a:ln w="9525">
+            <a:solidFill>
+              <a:srgbClr val="26231F"/>
+            </a:solidFill>
+          </a:ln>
+        </p:spPr>
+        <p:txBody>
+          <a:bodyPr rtlCol="0" anchor="ctr"/>
+          <a:lstStyle/>
+          <a:p>
+            <a:pPr algn="ctr"/>
+          </a:p>
+        </p:txBody>
+      </p:sp>
+      <p:sp>
+        <p:nvSpPr>
+          <p:cNvPr id="5" name="라벨"/>
+          <p:cNvSpPr txBox="1"/>
+          <p:nvPr/>
+        </p:nvSpPr>
+        <p:spPr>
+          <a:xfrm>
+            <a:off x="822960" y="2148840"/>
+            <a:ext cx="5608179" cy="274320"/>
           </a:xfrm>
           <a:prstGeom prst="rect">
             <a:avLst/>
           </a:prstGeom>
-        </p:spPr>
-      </p:pic>
+          <a:noFill/>
+        </p:spPr>
+        <p:txBody>
+          <a:bodyPr wrap="square" lIns="54864" rIns="54864" tIns="27432" bIns="27432" anchor="t">
+            <a:noAutofit/>
+          </a:bodyPr>
+          <a:lstStyle/>
+          <a:p>
+            <a:pPr algn="l">
+              <a:lnSpc>
+                <a:spcPct val="115000"/>
+              </a:lnSpc>
+            </a:pPr>
+            <a:r>
+              <a:rPr sz="1000" b="1" i="0" spc="250">
+                <a:solidFill>
+                  <a:srgbClr val="26231F"/>
+                </a:solidFill>
+              </a:rPr>
+              <a:t>FAMILY ALBUM</a:t>
+            </a:r>
+          </a:p>
+        </p:txBody>
+      </p:sp>
       <p:sp>
         <p:nvSpPr>
           <p:cNvPr id="2" name="Title 1"/>
@@ -5782,8 +6193,8 @@
         </p:nvSpPr>
         <p:spPr>
           <a:xfrm>
-            <a:off x="853418" y="2057400"/>
-            <a:ext cx="6095847" cy="1554480"/>
+            <a:off x="822960" y="2606040"/>
+            <a:ext cx="5608179" cy="1188720"/>
           </a:xfrm>
         </p:spPr>
         <p:txBody>
@@ -5798,9 +6209,9 @@
               </a:lnSpc>
             </a:pPr>
             <a:r>
-              <a:rPr sz="3600" b="1" i="0">
-                <a:solidFill>
-                  <a:srgbClr val="416F1F"/>
+              <a:rPr sz="4000" b="1" i="0">
+                <a:solidFill>
+                  <a:srgbClr val="26231F"/>
                 </a:solidFill>
               </a:rPr>
               <a:t>우리 가족 소개를 마칩니다</a:t>
@@ -5810,14 +6221,14 @@
       </p:sp>
       <p:sp>
         <p:nvSpPr>
-          <p:cNvPr id="4" name="한 줄 문구"/>
+          <p:cNvPr id="6" name="한 줄 문구"/>
           <p:cNvSpPr txBox="1"/>
           <p:nvPr/>
         </p:nvSpPr>
         <p:spPr>
           <a:xfrm>
-            <a:off x="853418" y="3749039"/>
-            <a:ext cx="6095847" cy="822960"/>
+            <a:off x="822960" y="3886200"/>
+            <a:ext cx="5608179" cy="822960"/>
           </a:xfrm>
           <a:prstGeom prst="rect">
             <a:avLst/>
@@ -5836,9 +6247,9 @@
               </a:lnSpc>
             </a:pPr>
             <a:r>
-              <a:rPr sz="1700" b="0" i="1">
-                <a:solidFill>
-                  <a:srgbClr val="416F1F"/>
+              <a:rPr sz="1700" b="0" i="0">
+                <a:solidFill>
+                  <a:srgbClr val="26231F"/>
                 </a:solidFill>
               </a:rPr>
               <a:t>읽어 주셔서 고맙습니다</a:t>
@@ -5848,14 +6259,14 @@
       </p:sp>
       <p:sp>
         <p:nvSpPr>
-          <p:cNvPr id="5" name="안내 문구"/>
+          <p:cNvPr id="7" name="안내 문구"/>
           <p:cNvSpPr txBox="1"/>
           <p:nvPr/>
         </p:nvSpPr>
         <p:spPr>
           <a:xfrm>
-            <a:off x="853418" y="4617720"/>
-            <a:ext cx="6095847" cy="914400"/>
+            <a:off x="822960" y="4754880"/>
+            <a:ext cx="5608179" cy="914400"/>
           </a:xfrm>
           <a:prstGeom prst="rect">
             <a:avLst/>
@@ -5876,7 +6287,7 @@
             <a:r>
               <a:rPr sz="1400" b="0" i="0">
                 <a:solidFill>
-                  <a:srgbClr val="666666"/>
+                  <a:srgbClr val="26231F"/>
                 </a:solidFill>
               </a:rPr>
               <a:t>고맙습니다 · 가족 이름</a:t>
@@ -5903,34 +6314,34 @@
         <a:sysClr val="window" lastClr="FFFFFF"/>
       </a:lt1>
       <a:dk2>
-        <a:srgbClr val="416F1F"/>
+        <a:srgbClr val="354927"/>
       </a:dk2>
       <a:lt2>
-        <a:srgbClr val="F7FCF3"/>
+        <a:srgbClr val="F2FDEA"/>
       </a:lt2>
       <a:accent1>
-        <a:srgbClr val="82CD4C"/>
+        <a:srgbClr val="BBED97"/>
       </a:accent1>
       <a:accent2>
-        <a:srgbClr val="339941"/>
+        <a:srgbClr val="BAF3BC"/>
       </a:accent2>
       <a:accent3>
-        <a:srgbClr val="416F1F"/>
+        <a:srgbClr val="354927"/>
       </a:accent3>
       <a:accent4>
-        <a:srgbClr val="E3F7D4"/>
+        <a:srgbClr val="E2FAD1"/>
       </a:accent4>
       <a:accent5>
-        <a:srgbClr val="5AB346"/>
+        <a:srgbClr val="BAF0AA"/>
       </a:accent5>
       <a:accent6>
-        <a:srgbClr val="8DA979"/>
+        <a:srgbClr val="86927D"/>
       </a:accent6>
       <a:hlink>
-        <a:srgbClr val="82CD4C"/>
+        <a:srgbClr val="BBED97"/>
       </a:hlink>
       <a:folHlink>
-        <a:srgbClr val="416F1F"/>
+        <a:srgbClr val="354927"/>
       </a:folHlink>
     </a:clrScheme>
     <a:fontScheme name="Office">
